--- a/outputs/421A-movin-slides.pptx
+++ b/outputs/421A-movin-slides.pptx
@@ -3184,14 +3184,14 @@
           <a:noFill/>
         </p:spPr>
         <p:txBody>
-          <a:bodyPr wrap="square" lIns="45720" rIns="45720" tIns="18288" bIns="18288">
-            <a:spAutoFit/>
+          <a:bodyPr wrap="square" anchor="t" lIns="0" rIns="0" tIns="0" bIns="0">
+            <a:noAutofit/>
           </a:bodyPr>
           <a:lstStyle/>
           <a:p>
             <a:pPr algn="ctr"/>
             <a:r>
-              <a:rPr sz="5400" b="1">
+              <a:rPr sz="5400" b="1" i="0">
                 <a:solidFill>
                   <a:srgbClr val="1F4E78"/>
                 </a:solidFill>
@@ -3218,14 +3218,14 @@
           <a:noFill/>
         </p:spPr>
         <p:txBody>
-          <a:bodyPr wrap="square" lIns="45720" rIns="45720" tIns="18288" bIns="18288">
-            <a:spAutoFit/>
+          <a:bodyPr wrap="square" anchor="t" lIns="0" rIns="0" tIns="0" bIns="0">
+            <a:noAutofit/>
           </a:bodyPr>
           <a:lstStyle/>
           <a:p>
             <a:pPr algn="ctr"/>
             <a:r>
-              <a:rPr sz="2600" b="0">
+              <a:rPr sz="2600" b="0" i="0">
                 <a:solidFill>
                   <a:srgbClr val="202020"/>
                 </a:solidFill>
@@ -3252,14 +3252,14 @@
           <a:noFill/>
         </p:spPr>
         <p:txBody>
-          <a:bodyPr wrap="square" lIns="45720" rIns="45720" tIns="18288" bIns="18288">
-            <a:spAutoFit/>
+          <a:bodyPr wrap="square" anchor="t" lIns="0" rIns="0" tIns="0" bIns="0">
+            <a:noAutofit/>
           </a:bodyPr>
           <a:lstStyle/>
           <a:p>
             <a:pPr algn="ctr"/>
             <a:r>
-              <a:rPr sz="2600" b="0">
+              <a:rPr sz="2600" b="0" i="0">
                 <a:solidFill>
                   <a:srgbClr val="202020"/>
                 </a:solidFill>
@@ -3286,14 +3286,14 @@
           <a:noFill/>
         </p:spPr>
         <p:txBody>
-          <a:bodyPr wrap="square" lIns="45720" rIns="45720" tIns="18288" bIns="18288">
-            <a:spAutoFit/>
+          <a:bodyPr wrap="square" anchor="t" lIns="0" rIns="0" tIns="0" bIns="0">
+            <a:noAutofit/>
           </a:bodyPr>
           <a:lstStyle/>
           <a:p>
             <a:pPr algn="ctr"/>
             <a:r>
-              <a:rPr sz="2600" b="0">
+              <a:rPr sz="2600" b="0" i="0">
                 <a:solidFill>
                   <a:srgbClr val="202020"/>
                 </a:solidFill>
@@ -3320,14 +3320,14 @@
           <a:noFill/>
         </p:spPr>
         <p:txBody>
-          <a:bodyPr wrap="square" lIns="45720" rIns="45720" tIns="18288" bIns="18288">
-            <a:spAutoFit/>
+          <a:bodyPr wrap="square" anchor="t" lIns="0" rIns="0" tIns="0" bIns="0">
+            <a:noAutofit/>
           </a:bodyPr>
           <a:lstStyle/>
           <a:p>
             <a:pPr algn="ctr"/>
             <a:r>
-              <a:rPr sz="1800" b="0">
+              <a:rPr sz="1800" b="0" i="0">
                 <a:solidFill>
                   <a:srgbClr val="808080"/>
                 </a:solidFill>
@@ -3406,8 +3406,8 @@
         </p:nvSpPr>
         <p:spPr>
           <a:xfrm>
-            <a:off x="457200" y="457200"/>
-            <a:ext cx="11277295" cy="822960"/>
+            <a:off x="457200" y="365760"/>
+            <a:ext cx="11277295" cy="914400"/>
           </a:xfrm>
           <a:prstGeom prst="rect">
             <a:avLst/>
@@ -3415,14 +3415,14 @@
           <a:noFill/>
         </p:spPr>
         <p:txBody>
-          <a:bodyPr wrap="square" lIns="45720" rIns="45720" tIns="18288" bIns="18288">
-            <a:spAutoFit/>
+          <a:bodyPr wrap="square" anchor="ctr" lIns="0" rIns="0" tIns="0" bIns="0">
+            <a:noAutofit/>
           </a:bodyPr>
           <a:lstStyle/>
           <a:p>
             <a:pPr algn="l"/>
             <a:r>
-              <a:rPr sz="3000" b="1">
+              <a:rPr sz="2800" b="1" i="0">
                 <a:solidFill>
                   <a:srgbClr val="1F4E78"/>
                 </a:solidFill>
@@ -3440,8 +3440,8 @@
         </p:nvSpPr>
         <p:spPr>
           <a:xfrm>
-            <a:off x="457200" y="1234440"/>
-            <a:ext cx="1828800" cy="36576"/>
+            <a:off x="457200" y="1298448"/>
+            <a:ext cx="2194560" cy="36576"/>
           </a:xfrm>
           <a:prstGeom prst="rect">
             <a:avLst/>
@@ -3483,8 +3483,8 @@
         </p:nvSpPr>
         <p:spPr>
           <a:xfrm>
-            <a:off x="457200" y="1463040"/>
-            <a:ext cx="11277295" cy="640080"/>
+            <a:off x="457200" y="1508760"/>
+            <a:ext cx="11277295" cy="502920"/>
           </a:xfrm>
           <a:prstGeom prst="rect">
             <a:avLst/>
@@ -3492,14 +3492,14 @@
           <a:noFill/>
         </p:spPr>
         <p:txBody>
-          <a:bodyPr wrap="square" lIns="45720" rIns="45720" tIns="18288" bIns="18288">
-            <a:spAutoFit/>
+          <a:bodyPr wrap="square" anchor="ctr" lIns="0" rIns="0" tIns="0" bIns="0">
+            <a:noAutofit/>
           </a:bodyPr>
           <a:lstStyle/>
           <a:p>
             <a:pPr algn="l"/>
             <a:r>
-              <a:rPr sz="2200" b="1">
+              <a:rPr sz="2000" b="1" i="0">
                 <a:solidFill>
                   <a:srgbClr val="C0392B"/>
                 </a:solidFill>
@@ -3517,8 +3517,8 @@
         </p:nvSpPr>
         <p:spPr>
           <a:xfrm>
-            <a:off x="640080" y="2286000"/>
-            <a:ext cx="10911535" cy="4069080"/>
+            <a:off x="640080" y="2148840"/>
+            <a:ext cx="10911535" cy="4114800"/>
           </a:xfrm>
           <a:prstGeom prst="rect">
             <a:avLst/>
@@ -3526,15 +3526,18 @@
           <a:noFill/>
         </p:spPr>
         <p:txBody>
-          <a:bodyPr wrap="square" lIns="45720" rIns="45720">
-            <a:spAutoFit/>
+          <a:bodyPr wrap="square" anchor="t" lIns="0" rIns="0" tIns="0" bIns="0">
+            <a:noAutofit/>
           </a:bodyPr>
           <a:lstStyle/>
           <a:p>
             <a:pPr algn="l">
               <a:lnSpc>
-                <a:spcPct val="130000"/>
+                <a:spcPct val="135000"/>
               </a:lnSpc>
+              <a:spcAft>
+                <a:spcPts val="600"/>
+              </a:spcAft>
             </a:pPr>
             <a:r>
               <a:rPr sz="1800">
@@ -3548,8 +3551,11 @@
           <a:p>
             <a:pPr algn="l">
               <a:lnSpc>
-                <a:spcPct val="130000"/>
+                <a:spcPct val="135000"/>
               </a:lnSpc>
+              <a:spcAft>
+                <a:spcPts val="600"/>
+              </a:spcAft>
             </a:pPr>
             <a:r>
               <a:rPr sz="1800">
@@ -3563,8 +3569,11 @@
           <a:p>
             <a:pPr algn="l">
               <a:lnSpc>
-                <a:spcPct val="130000"/>
+                <a:spcPct val="135000"/>
               </a:lnSpc>
+              <a:spcAft>
+                <a:spcPts val="600"/>
+              </a:spcAft>
             </a:pPr>
             <a:r>
               <a:rPr sz="1800">
@@ -3578,8 +3587,11 @@
           <a:p>
             <a:pPr algn="l">
               <a:lnSpc>
-                <a:spcPct val="130000"/>
+                <a:spcPct val="135000"/>
               </a:lnSpc>
+              <a:spcAft>
+                <a:spcPts val="600"/>
+              </a:spcAft>
             </a:pPr>
             <a:r>
               <a:rPr sz="1800">
@@ -3609,14 +3621,14 @@
           <a:noFill/>
         </p:spPr>
         <p:txBody>
-          <a:bodyPr wrap="square" lIns="45720" rIns="45720" tIns="18288" bIns="18288">
-            <a:spAutoFit/>
+          <a:bodyPr wrap="square" anchor="ctr" lIns="0" rIns="0" tIns="0" bIns="0">
+            <a:noAutofit/>
           </a:bodyPr>
           <a:lstStyle/>
           <a:p>
             <a:pPr algn="l"/>
             <a:r>
-              <a:rPr sz="1100" b="0">
+              <a:rPr sz="1100" b="0" i="1">
                 <a:solidFill>
                   <a:srgbClr val="808080"/>
                 </a:solidFill>
@@ -3652,8 +3664,8 @@
         </p:nvSpPr>
         <p:spPr>
           <a:xfrm>
-            <a:off x="457200" y="457200"/>
-            <a:ext cx="11277295" cy="822960"/>
+            <a:off x="457200" y="365760"/>
+            <a:ext cx="11277295" cy="914400"/>
           </a:xfrm>
           <a:prstGeom prst="rect">
             <a:avLst/>
@@ -3661,14 +3673,14 @@
           <a:noFill/>
         </p:spPr>
         <p:txBody>
-          <a:bodyPr wrap="square" lIns="45720" rIns="45720" tIns="18288" bIns="18288">
-            <a:spAutoFit/>
+          <a:bodyPr wrap="square" anchor="ctr" lIns="0" rIns="0" tIns="0" bIns="0">
+            <a:noAutofit/>
           </a:bodyPr>
           <a:lstStyle/>
           <a:p>
             <a:pPr algn="l"/>
             <a:r>
-              <a:rPr sz="3000" b="1">
+              <a:rPr sz="2800" b="1" i="0">
                 <a:solidFill>
                   <a:srgbClr val="1F4E78"/>
                 </a:solidFill>
@@ -3686,8 +3698,8 @@
         </p:nvSpPr>
         <p:spPr>
           <a:xfrm>
-            <a:off x="457200" y="1234440"/>
-            <a:ext cx="1828800" cy="36576"/>
+            <a:off x="457200" y="1298448"/>
+            <a:ext cx="2194560" cy="36576"/>
           </a:xfrm>
           <a:prstGeom prst="rect">
             <a:avLst/>
@@ -3729,8 +3741,8 @@
         </p:nvSpPr>
         <p:spPr>
           <a:xfrm>
-            <a:off x="822960" y="1463040"/>
-            <a:ext cx="10545775" cy="4892040"/>
+            <a:off x="822960" y="2148840"/>
+            <a:ext cx="10545775" cy="4114800"/>
           </a:xfrm>
           <a:prstGeom prst="rect">
             <a:avLst/>
@@ -3738,15 +3750,18 @@
           <a:noFill/>
         </p:spPr>
         <p:txBody>
-          <a:bodyPr wrap="square" lIns="45720" rIns="45720">
-            <a:spAutoFit/>
+          <a:bodyPr wrap="square" anchor="t" lIns="0" rIns="0" tIns="0" bIns="0">
+            <a:noAutofit/>
           </a:bodyPr>
           <a:lstStyle/>
           <a:p>
             <a:pPr algn="l">
               <a:lnSpc>
-                <a:spcPct val="130000"/>
+                <a:spcPct val="135000"/>
               </a:lnSpc>
+              <a:spcAft>
+                <a:spcPts val="600"/>
+              </a:spcAft>
             </a:pPr>
             <a:r>
               <a:rPr sz="2200">
@@ -3837,14 +3852,14 @@
           <a:noFill/>
         </p:spPr>
         <p:txBody>
-          <a:bodyPr wrap="square" lIns="45720" rIns="45720" tIns="18288" bIns="18288">
-            <a:spAutoFit/>
+          <a:bodyPr wrap="square" anchor="ctr" lIns="0" rIns="0" tIns="0" bIns="0">
+            <a:noAutofit/>
           </a:bodyPr>
           <a:lstStyle/>
           <a:p>
             <a:pPr algn="ctr"/>
             <a:r>
-              <a:rPr sz="5800" b="1">
+              <a:rPr sz="5800" b="1" i="0">
                 <a:solidFill>
                   <a:srgbClr val="FFFFFF"/>
                 </a:solidFill>
@@ -3880,8 +3895,8 @@
         </p:nvSpPr>
         <p:spPr>
           <a:xfrm>
-            <a:off x="457200" y="457200"/>
-            <a:ext cx="11277295" cy="822960"/>
+            <a:off x="457200" y="365760"/>
+            <a:ext cx="11277295" cy="914400"/>
           </a:xfrm>
           <a:prstGeom prst="rect">
             <a:avLst/>
@@ -3889,14 +3904,14 @@
           <a:noFill/>
         </p:spPr>
         <p:txBody>
-          <a:bodyPr wrap="square" lIns="45720" rIns="45720" tIns="18288" bIns="18288">
-            <a:spAutoFit/>
+          <a:bodyPr wrap="square" anchor="ctr" lIns="0" rIns="0" tIns="0" bIns="0">
+            <a:noAutofit/>
           </a:bodyPr>
           <a:lstStyle/>
           <a:p>
             <a:pPr algn="l"/>
             <a:r>
-              <a:rPr sz="3000" b="1">
+              <a:rPr sz="2800" b="1" i="0">
                 <a:solidFill>
                   <a:srgbClr val="1F4E78"/>
                 </a:solidFill>
@@ -3914,8 +3929,8 @@
         </p:nvSpPr>
         <p:spPr>
           <a:xfrm>
-            <a:off x="457200" y="1234440"/>
-            <a:ext cx="1828800" cy="36576"/>
+            <a:off x="457200" y="1298448"/>
+            <a:ext cx="2194560" cy="36576"/>
           </a:xfrm>
           <a:prstGeom prst="rect">
             <a:avLst/>
@@ -3957,8 +3972,8 @@
         </p:nvSpPr>
         <p:spPr>
           <a:xfrm>
-            <a:off x="457200" y="1463040"/>
-            <a:ext cx="11277295" cy="640080"/>
+            <a:off x="457200" y="1508760"/>
+            <a:ext cx="11277295" cy="502920"/>
           </a:xfrm>
           <a:prstGeom prst="rect">
             <a:avLst/>
@@ -3966,14 +3981,14 @@
           <a:noFill/>
         </p:spPr>
         <p:txBody>
-          <a:bodyPr wrap="square" lIns="45720" rIns="45720" tIns="18288" bIns="18288">
-            <a:spAutoFit/>
+          <a:bodyPr wrap="square" anchor="ctr" lIns="0" rIns="0" tIns="0" bIns="0">
+            <a:noAutofit/>
           </a:bodyPr>
           <a:lstStyle/>
           <a:p>
             <a:pPr algn="l"/>
             <a:r>
-              <a:rPr sz="2200" b="1">
+              <a:rPr sz="2000" b="1" i="0">
                 <a:solidFill>
                   <a:srgbClr val="C0392B"/>
                 </a:solidFill>
@@ -3991,8 +4006,8 @@
         </p:nvSpPr>
         <p:spPr>
           <a:xfrm>
-            <a:off x="640080" y="2286000"/>
-            <a:ext cx="10911535" cy="4069080"/>
+            <a:off x="640080" y="2148840"/>
+            <a:ext cx="10911535" cy="4114800"/>
           </a:xfrm>
           <a:prstGeom prst="rect">
             <a:avLst/>
@@ -4000,15 +4015,18 @@
           <a:noFill/>
         </p:spPr>
         <p:txBody>
-          <a:bodyPr wrap="square" lIns="45720" rIns="45720">
-            <a:spAutoFit/>
+          <a:bodyPr wrap="square" anchor="t" lIns="0" rIns="0" tIns="0" bIns="0">
+            <a:noAutofit/>
           </a:bodyPr>
           <a:lstStyle/>
           <a:p>
             <a:pPr algn="l">
               <a:lnSpc>
-                <a:spcPct val="130000"/>
+                <a:spcPct val="135000"/>
               </a:lnSpc>
+              <a:spcAft>
+                <a:spcPts val="600"/>
+              </a:spcAft>
             </a:pPr>
             <a:r>
               <a:rPr sz="1800">
@@ -4022,8 +4040,11 @@
           <a:p>
             <a:pPr algn="l">
               <a:lnSpc>
-                <a:spcPct val="130000"/>
+                <a:spcPct val="135000"/>
               </a:lnSpc>
+              <a:spcAft>
+                <a:spcPts val="600"/>
+              </a:spcAft>
             </a:pPr>
             <a:r>
               <a:rPr sz="1800">
@@ -4037,8 +4058,11 @@
           <a:p>
             <a:pPr algn="l">
               <a:lnSpc>
-                <a:spcPct val="130000"/>
+                <a:spcPct val="135000"/>
               </a:lnSpc>
+              <a:spcAft>
+                <a:spcPts val="600"/>
+              </a:spcAft>
             </a:pPr>
             <a:r>
               <a:rPr sz="1800">
@@ -4052,8 +4076,11 @@
           <a:p>
             <a:pPr algn="l">
               <a:lnSpc>
-                <a:spcPct val="130000"/>
+                <a:spcPct val="135000"/>
               </a:lnSpc>
+              <a:spcAft>
+                <a:spcPts val="600"/>
+              </a:spcAft>
             </a:pPr>
             <a:r>
               <a:rPr sz="1800">
@@ -4092,8 +4119,8 @@
         </p:nvSpPr>
         <p:spPr>
           <a:xfrm>
-            <a:off x="457200" y="457200"/>
-            <a:ext cx="11277295" cy="822960"/>
+            <a:off x="457200" y="365760"/>
+            <a:ext cx="11277295" cy="914400"/>
           </a:xfrm>
           <a:prstGeom prst="rect">
             <a:avLst/>
@@ -4101,14 +4128,14 @@
           <a:noFill/>
         </p:spPr>
         <p:txBody>
-          <a:bodyPr wrap="square" lIns="45720" rIns="45720" tIns="18288" bIns="18288">
-            <a:spAutoFit/>
+          <a:bodyPr wrap="square" anchor="ctr" lIns="0" rIns="0" tIns="0" bIns="0">
+            <a:noAutofit/>
           </a:bodyPr>
           <a:lstStyle/>
           <a:p>
             <a:pPr algn="l"/>
             <a:r>
-              <a:rPr sz="3000" b="1">
+              <a:rPr sz="2800" b="1" i="0">
                 <a:solidFill>
                   <a:srgbClr val="1F4E78"/>
                 </a:solidFill>
@@ -4126,8 +4153,8 @@
         </p:nvSpPr>
         <p:spPr>
           <a:xfrm>
-            <a:off x="457200" y="1234440"/>
-            <a:ext cx="1828800" cy="36576"/>
+            <a:off x="457200" y="1298448"/>
+            <a:ext cx="2194560" cy="36576"/>
           </a:xfrm>
           <a:prstGeom prst="rect">
             <a:avLst/>
@@ -4169,8 +4196,8 @@
         </p:nvSpPr>
         <p:spPr>
           <a:xfrm>
-            <a:off x="457200" y="1463040"/>
-            <a:ext cx="11277295" cy="640080"/>
+            <a:off x="457200" y="1508760"/>
+            <a:ext cx="11277295" cy="502920"/>
           </a:xfrm>
           <a:prstGeom prst="rect">
             <a:avLst/>
@@ -4178,14 +4205,14 @@
           <a:noFill/>
         </p:spPr>
         <p:txBody>
-          <a:bodyPr wrap="square" lIns="45720" rIns="45720" tIns="18288" bIns="18288">
-            <a:spAutoFit/>
+          <a:bodyPr wrap="square" anchor="ctr" lIns="0" rIns="0" tIns="0" bIns="0">
+            <a:noAutofit/>
           </a:bodyPr>
           <a:lstStyle/>
           <a:p>
             <a:pPr algn="l"/>
             <a:r>
-              <a:rPr sz="2200" b="1">
+              <a:rPr sz="2000" b="1" i="0">
                 <a:solidFill>
                   <a:srgbClr val="C0392B"/>
                 </a:solidFill>
@@ -4204,7 +4231,7 @@
           <p:nvPr/>
         </p:nvGraphicFramePr>
         <p:xfrm>
-          <a:off x="457200" y="2286000"/>
+          <a:off x="457200" y="2148840"/>
           <a:ext cx="11277295" cy="914400"/>
         </p:xfrm>
         <a:graphic>
@@ -4384,8 +4411,8 @@
         </p:nvSpPr>
         <p:spPr>
           <a:xfrm>
-            <a:off x="457200" y="457200"/>
-            <a:ext cx="11277295" cy="822960"/>
+            <a:off x="457200" y="365760"/>
+            <a:ext cx="11277295" cy="914400"/>
           </a:xfrm>
           <a:prstGeom prst="rect">
             <a:avLst/>
@@ -4393,14 +4420,14 @@
           <a:noFill/>
         </p:spPr>
         <p:txBody>
-          <a:bodyPr wrap="square" lIns="45720" rIns="45720" tIns="18288" bIns="18288">
-            <a:spAutoFit/>
+          <a:bodyPr wrap="square" anchor="ctr" lIns="0" rIns="0" tIns="0" bIns="0">
+            <a:noAutofit/>
           </a:bodyPr>
           <a:lstStyle/>
           <a:p>
             <a:pPr algn="l"/>
             <a:r>
-              <a:rPr sz="3000" b="1">
+              <a:rPr sz="2800" b="1" i="0">
                 <a:solidFill>
                   <a:srgbClr val="1F4E78"/>
                 </a:solidFill>
@@ -4418,8 +4445,8 @@
         </p:nvSpPr>
         <p:spPr>
           <a:xfrm>
-            <a:off x="457200" y="1234440"/>
-            <a:ext cx="1828800" cy="36576"/>
+            <a:off x="457200" y="1298448"/>
+            <a:ext cx="2194560" cy="36576"/>
           </a:xfrm>
           <a:prstGeom prst="rect">
             <a:avLst/>
@@ -4461,8 +4488,8 @@
         </p:nvSpPr>
         <p:spPr>
           <a:xfrm>
-            <a:off x="457200" y="1463040"/>
-            <a:ext cx="11277295" cy="640080"/>
+            <a:off x="457200" y="1508760"/>
+            <a:ext cx="11277295" cy="502920"/>
           </a:xfrm>
           <a:prstGeom prst="rect">
             <a:avLst/>
@@ -4470,14 +4497,14 @@
           <a:noFill/>
         </p:spPr>
         <p:txBody>
-          <a:bodyPr wrap="square" lIns="45720" rIns="45720" tIns="18288" bIns="18288">
-            <a:spAutoFit/>
+          <a:bodyPr wrap="square" anchor="ctr" lIns="0" rIns="0" tIns="0" bIns="0">
+            <a:noAutofit/>
           </a:bodyPr>
           <a:lstStyle/>
           <a:p>
             <a:pPr algn="l"/>
             <a:r>
-              <a:rPr sz="2200" b="1">
+              <a:rPr sz="2000" b="1" i="0">
                 <a:solidFill>
                   <a:srgbClr val="C0392B"/>
                 </a:solidFill>
@@ -4495,8 +4522,8 @@
         </p:nvSpPr>
         <p:spPr>
           <a:xfrm>
-            <a:off x="640080" y="2286000"/>
-            <a:ext cx="10911535" cy="4069080"/>
+            <a:off x="640080" y="2148840"/>
+            <a:ext cx="10911535" cy="4114800"/>
           </a:xfrm>
           <a:prstGeom prst="rect">
             <a:avLst/>
@@ -4504,15 +4531,18 @@
           <a:noFill/>
         </p:spPr>
         <p:txBody>
-          <a:bodyPr wrap="square" lIns="45720" rIns="45720">
-            <a:spAutoFit/>
+          <a:bodyPr wrap="square" anchor="t" lIns="0" rIns="0" tIns="0" bIns="0">
+            <a:noAutofit/>
           </a:bodyPr>
           <a:lstStyle/>
           <a:p>
             <a:pPr algn="l">
               <a:lnSpc>
-                <a:spcPct val="130000"/>
+                <a:spcPct val="135000"/>
               </a:lnSpc>
+              <a:spcAft>
+                <a:spcPts val="600"/>
+              </a:spcAft>
             </a:pPr>
             <a:r>
               <a:rPr sz="1800">
@@ -4526,8 +4556,11 @@
           <a:p>
             <a:pPr algn="l">
               <a:lnSpc>
-                <a:spcPct val="130000"/>
+                <a:spcPct val="135000"/>
               </a:lnSpc>
+              <a:spcAft>
+                <a:spcPts val="600"/>
+              </a:spcAft>
             </a:pPr>
             <a:r>
               <a:rPr sz="1800">
@@ -4541,8 +4574,11 @@
           <a:p>
             <a:pPr algn="l">
               <a:lnSpc>
-                <a:spcPct val="130000"/>
+                <a:spcPct val="135000"/>
               </a:lnSpc>
+              <a:spcAft>
+                <a:spcPts val="600"/>
+              </a:spcAft>
             </a:pPr>
             <a:r>
               <a:rPr sz="1800">
@@ -4572,14 +4608,14 @@
           <a:noFill/>
         </p:spPr>
         <p:txBody>
-          <a:bodyPr wrap="square" lIns="45720" rIns="45720" tIns="18288" bIns="18288">
-            <a:spAutoFit/>
+          <a:bodyPr wrap="square" anchor="ctr" lIns="0" rIns="0" tIns="0" bIns="0">
+            <a:noAutofit/>
           </a:bodyPr>
           <a:lstStyle/>
           <a:p>
             <a:pPr algn="l"/>
             <a:r>
-              <a:rPr sz="1100" b="0">
+              <a:rPr sz="1100" b="0" i="1">
                 <a:solidFill>
                   <a:srgbClr val="808080"/>
                 </a:solidFill>
@@ -4615,8 +4651,8 @@
         </p:nvSpPr>
         <p:spPr>
           <a:xfrm>
-            <a:off x="457200" y="457200"/>
-            <a:ext cx="11277295" cy="822960"/>
+            <a:off x="457200" y="365760"/>
+            <a:ext cx="11277295" cy="914400"/>
           </a:xfrm>
           <a:prstGeom prst="rect">
             <a:avLst/>
@@ -4624,14 +4660,14 @@
           <a:noFill/>
         </p:spPr>
         <p:txBody>
-          <a:bodyPr wrap="square" lIns="45720" rIns="45720" tIns="18288" bIns="18288">
-            <a:spAutoFit/>
+          <a:bodyPr wrap="square" anchor="ctr" lIns="0" rIns="0" tIns="0" bIns="0">
+            <a:noAutofit/>
           </a:bodyPr>
           <a:lstStyle/>
           <a:p>
             <a:pPr algn="l"/>
             <a:r>
-              <a:rPr sz="3000" b="1">
+              <a:rPr sz="2800" b="1" i="0">
                 <a:solidFill>
                   <a:srgbClr val="1F4E78"/>
                 </a:solidFill>
@@ -4649,8 +4685,8 @@
         </p:nvSpPr>
         <p:spPr>
           <a:xfrm>
-            <a:off x="457200" y="1234440"/>
-            <a:ext cx="1828800" cy="36576"/>
+            <a:off x="457200" y="1298448"/>
+            <a:ext cx="2194560" cy="36576"/>
           </a:xfrm>
           <a:prstGeom prst="rect">
             <a:avLst/>
@@ -4692,8 +4728,8 @@
         </p:nvSpPr>
         <p:spPr>
           <a:xfrm>
-            <a:off x="457200" y="1463040"/>
-            <a:ext cx="11277295" cy="640080"/>
+            <a:off x="457200" y="1508760"/>
+            <a:ext cx="11277295" cy="502920"/>
           </a:xfrm>
           <a:prstGeom prst="rect">
             <a:avLst/>
@@ -4701,14 +4737,14 @@
           <a:noFill/>
         </p:spPr>
         <p:txBody>
-          <a:bodyPr wrap="square" lIns="45720" rIns="45720" tIns="18288" bIns="18288">
-            <a:spAutoFit/>
+          <a:bodyPr wrap="square" anchor="ctr" lIns="0" rIns="0" tIns="0" bIns="0">
+            <a:noAutofit/>
           </a:bodyPr>
           <a:lstStyle/>
           <a:p>
             <a:pPr algn="l"/>
             <a:r>
-              <a:rPr sz="2200" b="1">
+              <a:rPr sz="2000" b="1" i="0">
                 <a:solidFill>
                   <a:srgbClr val="C0392B"/>
                 </a:solidFill>
@@ -4726,8 +4762,8 @@
         </p:nvSpPr>
         <p:spPr>
           <a:xfrm>
-            <a:off x="731520" y="2286000"/>
-            <a:ext cx="10728655" cy="3977640"/>
+            <a:off x="731520" y="2148840"/>
+            <a:ext cx="10728655" cy="4114800"/>
           </a:xfrm>
           <a:prstGeom prst="rect">
             <a:avLst/>
@@ -4735,8 +4771,8 @@
           <a:noFill/>
         </p:spPr>
         <p:txBody>
-          <a:bodyPr wrap="none" tIns="91440">
-            <a:spAutoFit/>
+          <a:bodyPr wrap="none" anchor="t" tIns="91440">
+            <a:noAutofit/>
           </a:bodyPr>
           <a:lstStyle/>
           <a:p>
@@ -4790,8 +4826,8 @@
         </p:nvSpPr>
         <p:spPr>
           <a:xfrm>
-            <a:off x="457200" y="457200"/>
-            <a:ext cx="11277295" cy="822960"/>
+            <a:off x="457200" y="365760"/>
+            <a:ext cx="11277295" cy="914400"/>
           </a:xfrm>
           <a:prstGeom prst="rect">
             <a:avLst/>
@@ -4799,14 +4835,14 @@
           <a:noFill/>
         </p:spPr>
         <p:txBody>
-          <a:bodyPr wrap="square" lIns="45720" rIns="45720" tIns="18288" bIns="18288">
-            <a:spAutoFit/>
+          <a:bodyPr wrap="square" anchor="ctr" lIns="0" rIns="0" tIns="0" bIns="0">
+            <a:noAutofit/>
           </a:bodyPr>
           <a:lstStyle/>
           <a:p>
             <a:pPr algn="l"/>
             <a:r>
-              <a:rPr sz="3000" b="1">
+              <a:rPr sz="2800" b="1" i="0">
                 <a:solidFill>
                   <a:srgbClr val="1F4E78"/>
                 </a:solidFill>
@@ -4824,8 +4860,8 @@
         </p:nvSpPr>
         <p:spPr>
           <a:xfrm>
-            <a:off x="457200" y="1234440"/>
-            <a:ext cx="1828800" cy="36576"/>
+            <a:off x="457200" y="1298448"/>
+            <a:ext cx="2194560" cy="36576"/>
           </a:xfrm>
           <a:prstGeom prst="rect">
             <a:avLst/>
@@ -4867,8 +4903,8 @@
         </p:nvSpPr>
         <p:spPr>
           <a:xfrm>
-            <a:off x="822960" y="1463040"/>
-            <a:ext cx="10545775" cy="4892040"/>
+            <a:off x="822960" y="2148840"/>
+            <a:ext cx="10545775" cy="4114800"/>
           </a:xfrm>
           <a:prstGeom prst="rect">
             <a:avLst/>
@@ -4876,15 +4912,18 @@
           <a:noFill/>
         </p:spPr>
         <p:txBody>
-          <a:bodyPr wrap="square" lIns="45720" rIns="45720">
-            <a:spAutoFit/>
+          <a:bodyPr wrap="square" anchor="t" lIns="0" rIns="0" tIns="0" bIns="0">
+            <a:noAutofit/>
           </a:bodyPr>
           <a:lstStyle/>
           <a:p>
             <a:pPr algn="l">
               <a:lnSpc>
-                <a:spcPct val="130000"/>
+                <a:spcPct val="135000"/>
               </a:lnSpc>
+              <a:spcAft>
+                <a:spcPts val="600"/>
+              </a:spcAft>
             </a:pPr>
             <a:r>
               <a:rPr sz="2200">
@@ -4975,14 +5014,14 @@
           <a:noFill/>
         </p:spPr>
         <p:txBody>
-          <a:bodyPr wrap="square" lIns="45720" rIns="45720" tIns="18288" bIns="18288">
-            <a:spAutoFit/>
+          <a:bodyPr wrap="square" anchor="ctr" lIns="0" rIns="0" tIns="0" bIns="0">
+            <a:noAutofit/>
           </a:bodyPr>
           <a:lstStyle/>
           <a:p>
             <a:pPr algn="ctr"/>
             <a:r>
-              <a:rPr sz="5800" b="1">
+              <a:rPr sz="5800" b="1" i="0">
                 <a:solidFill>
                   <a:srgbClr val="FFFFFF"/>
                 </a:solidFill>
@@ -5018,8 +5057,8 @@
         </p:nvSpPr>
         <p:spPr>
           <a:xfrm>
-            <a:off x="457200" y="457200"/>
-            <a:ext cx="11277295" cy="822960"/>
+            <a:off x="457200" y="365760"/>
+            <a:ext cx="11277295" cy="914400"/>
           </a:xfrm>
           <a:prstGeom prst="rect">
             <a:avLst/>
@@ -5027,14 +5066,14 @@
           <a:noFill/>
         </p:spPr>
         <p:txBody>
-          <a:bodyPr wrap="square" lIns="45720" rIns="45720" tIns="18288" bIns="18288">
-            <a:spAutoFit/>
+          <a:bodyPr wrap="square" anchor="ctr" lIns="0" rIns="0" tIns="0" bIns="0">
+            <a:noAutofit/>
           </a:bodyPr>
           <a:lstStyle/>
           <a:p>
             <a:pPr algn="l"/>
             <a:r>
-              <a:rPr sz="3000" b="1">
+              <a:rPr sz="2800" b="1" i="0">
                 <a:solidFill>
                   <a:srgbClr val="1F4E78"/>
                 </a:solidFill>
@@ -5052,8 +5091,8 @@
         </p:nvSpPr>
         <p:spPr>
           <a:xfrm>
-            <a:off x="457200" y="1234440"/>
-            <a:ext cx="1828800" cy="36576"/>
+            <a:off x="457200" y="1298448"/>
+            <a:ext cx="2194560" cy="36576"/>
           </a:xfrm>
           <a:prstGeom prst="rect">
             <a:avLst/>
@@ -5095,8 +5134,8 @@
         </p:nvSpPr>
         <p:spPr>
           <a:xfrm>
-            <a:off x="457200" y="1463040"/>
-            <a:ext cx="11277295" cy="640080"/>
+            <a:off x="457200" y="1508760"/>
+            <a:ext cx="11277295" cy="502920"/>
           </a:xfrm>
           <a:prstGeom prst="rect">
             <a:avLst/>
@@ -5104,14 +5143,14 @@
           <a:noFill/>
         </p:spPr>
         <p:txBody>
-          <a:bodyPr wrap="square" lIns="45720" rIns="45720" tIns="18288" bIns="18288">
-            <a:spAutoFit/>
+          <a:bodyPr wrap="square" anchor="ctr" lIns="0" rIns="0" tIns="0" bIns="0">
+            <a:noAutofit/>
           </a:bodyPr>
           <a:lstStyle/>
           <a:p>
             <a:pPr algn="l"/>
             <a:r>
-              <a:rPr sz="2200" b="1">
+              <a:rPr sz="2000" b="1" i="0">
                 <a:solidFill>
                   <a:srgbClr val="C0392B"/>
                 </a:solidFill>
@@ -5129,8 +5168,8 @@
         </p:nvSpPr>
         <p:spPr>
           <a:xfrm>
-            <a:off x="640080" y="2286000"/>
-            <a:ext cx="10911535" cy="4069080"/>
+            <a:off x="640080" y="2148840"/>
+            <a:ext cx="10911535" cy="4114800"/>
           </a:xfrm>
           <a:prstGeom prst="rect">
             <a:avLst/>
@@ -5138,15 +5177,18 @@
           <a:noFill/>
         </p:spPr>
         <p:txBody>
-          <a:bodyPr wrap="square" lIns="45720" rIns="45720">
-            <a:spAutoFit/>
+          <a:bodyPr wrap="square" anchor="t" lIns="0" rIns="0" tIns="0" bIns="0">
+            <a:noAutofit/>
           </a:bodyPr>
           <a:lstStyle/>
           <a:p>
             <a:pPr algn="l">
               <a:lnSpc>
-                <a:spcPct val="130000"/>
+                <a:spcPct val="135000"/>
               </a:lnSpc>
+              <a:spcAft>
+                <a:spcPts val="600"/>
+              </a:spcAft>
             </a:pPr>
             <a:r>
               <a:rPr sz="1800">
@@ -5160,8 +5202,11 @@
           <a:p>
             <a:pPr algn="l">
               <a:lnSpc>
-                <a:spcPct val="130000"/>
+                <a:spcPct val="135000"/>
               </a:lnSpc>
+              <a:spcAft>
+                <a:spcPts val="600"/>
+              </a:spcAft>
             </a:pPr>
             <a:r>
               <a:rPr sz="1800">
@@ -5175,8 +5220,11 @@
           <a:p>
             <a:pPr algn="l">
               <a:lnSpc>
-                <a:spcPct val="130000"/>
+                <a:spcPct val="135000"/>
               </a:lnSpc>
+              <a:spcAft>
+                <a:spcPts val="600"/>
+              </a:spcAft>
             </a:pPr>
             <a:r>
               <a:rPr sz="1800">
@@ -5190,8 +5238,11 @@
           <a:p>
             <a:pPr algn="l">
               <a:lnSpc>
-                <a:spcPct val="130000"/>
+                <a:spcPct val="135000"/>
               </a:lnSpc>
+              <a:spcAft>
+                <a:spcPts val="600"/>
+              </a:spcAft>
             </a:pPr>
             <a:r>
               <a:rPr sz="1800">
@@ -5230,8 +5281,8 @@
         </p:nvSpPr>
         <p:spPr>
           <a:xfrm>
-            <a:off x="457200" y="457200"/>
-            <a:ext cx="11277295" cy="822960"/>
+            <a:off x="457200" y="365760"/>
+            <a:ext cx="11277295" cy="914400"/>
           </a:xfrm>
           <a:prstGeom prst="rect">
             <a:avLst/>
@@ -5239,14 +5290,14 @@
           <a:noFill/>
         </p:spPr>
         <p:txBody>
-          <a:bodyPr wrap="square" lIns="45720" rIns="45720" tIns="18288" bIns="18288">
-            <a:spAutoFit/>
+          <a:bodyPr wrap="square" anchor="ctr" lIns="0" rIns="0" tIns="0" bIns="0">
+            <a:noAutofit/>
           </a:bodyPr>
           <a:lstStyle/>
           <a:p>
             <a:pPr algn="l"/>
             <a:r>
-              <a:rPr sz="3000" b="1">
+              <a:rPr sz="2800" b="1" i="0">
                 <a:solidFill>
                   <a:srgbClr val="1F4E78"/>
                 </a:solidFill>
@@ -5264,8 +5315,8 @@
         </p:nvSpPr>
         <p:spPr>
           <a:xfrm>
-            <a:off x="457200" y="1234440"/>
-            <a:ext cx="1828800" cy="36576"/>
+            <a:off x="457200" y="1298448"/>
+            <a:ext cx="2194560" cy="36576"/>
           </a:xfrm>
           <a:prstGeom prst="rect">
             <a:avLst/>
@@ -5307,8 +5358,8 @@
         </p:nvSpPr>
         <p:spPr>
           <a:xfrm>
-            <a:off x="457200" y="1463040"/>
-            <a:ext cx="11277295" cy="640080"/>
+            <a:off x="457200" y="1508760"/>
+            <a:ext cx="11277295" cy="502920"/>
           </a:xfrm>
           <a:prstGeom prst="rect">
             <a:avLst/>
@@ -5316,14 +5367,14 @@
           <a:noFill/>
         </p:spPr>
         <p:txBody>
-          <a:bodyPr wrap="square" lIns="45720" rIns="45720" tIns="18288" bIns="18288">
-            <a:spAutoFit/>
+          <a:bodyPr wrap="square" anchor="ctr" lIns="0" rIns="0" tIns="0" bIns="0">
+            <a:noAutofit/>
           </a:bodyPr>
           <a:lstStyle/>
           <a:p>
             <a:pPr algn="l"/>
             <a:r>
-              <a:rPr sz="2200" b="1">
+              <a:rPr sz="2000" b="1" i="0">
                 <a:solidFill>
                   <a:srgbClr val="C0392B"/>
                 </a:solidFill>
@@ -5341,8 +5392,8 @@
         </p:nvSpPr>
         <p:spPr>
           <a:xfrm>
-            <a:off x="640080" y="2286000"/>
-            <a:ext cx="10911535" cy="4069080"/>
+            <a:off x="640080" y="2148840"/>
+            <a:ext cx="10911535" cy="4114800"/>
           </a:xfrm>
           <a:prstGeom prst="rect">
             <a:avLst/>
@@ -5350,15 +5401,18 @@
           <a:noFill/>
         </p:spPr>
         <p:txBody>
-          <a:bodyPr wrap="square" lIns="45720" rIns="45720">
-            <a:spAutoFit/>
+          <a:bodyPr wrap="square" anchor="t" lIns="0" rIns="0" tIns="0" bIns="0">
+            <a:noAutofit/>
           </a:bodyPr>
           <a:lstStyle/>
           <a:p>
             <a:pPr algn="l">
               <a:lnSpc>
-                <a:spcPct val="130000"/>
+                <a:spcPct val="135000"/>
               </a:lnSpc>
+              <a:spcAft>
+                <a:spcPts val="600"/>
+              </a:spcAft>
             </a:pPr>
             <a:r>
               <a:rPr sz="1800">
@@ -5372,8 +5426,11 @@
           <a:p>
             <a:pPr algn="l">
               <a:lnSpc>
-                <a:spcPct val="130000"/>
+                <a:spcPct val="135000"/>
               </a:lnSpc>
+              <a:spcAft>
+                <a:spcPts val="600"/>
+              </a:spcAft>
             </a:pPr>
             <a:r>
               <a:rPr sz="1800">
@@ -5387,8 +5444,11 @@
           <a:p>
             <a:pPr algn="l">
               <a:lnSpc>
-                <a:spcPct val="130000"/>
+                <a:spcPct val="135000"/>
               </a:lnSpc>
+              <a:spcAft>
+                <a:spcPts val="600"/>
+              </a:spcAft>
             </a:pPr>
             <a:r>
               <a:rPr sz="1800">
@@ -5402,8 +5462,11 @@
           <a:p>
             <a:pPr algn="l">
               <a:lnSpc>
-                <a:spcPct val="130000"/>
+                <a:spcPct val="135000"/>
               </a:lnSpc>
+              <a:spcAft>
+                <a:spcPts val="600"/>
+              </a:spcAft>
             </a:pPr>
             <a:r>
               <a:rPr sz="1800">
@@ -5417,8 +5480,11 @@
           <a:p>
             <a:pPr algn="l">
               <a:lnSpc>
-                <a:spcPct val="130000"/>
+                <a:spcPct val="135000"/>
               </a:lnSpc>
+              <a:spcAft>
+                <a:spcPts val="600"/>
+              </a:spcAft>
             </a:pPr>
             <a:r>
               <a:rPr sz="1800">
@@ -5448,14 +5514,14 @@
           <a:noFill/>
         </p:spPr>
         <p:txBody>
-          <a:bodyPr wrap="square" lIns="45720" rIns="45720" tIns="18288" bIns="18288">
-            <a:spAutoFit/>
+          <a:bodyPr wrap="square" anchor="ctr" lIns="0" rIns="0" tIns="0" bIns="0">
+            <a:noAutofit/>
           </a:bodyPr>
           <a:lstStyle/>
           <a:p>
             <a:pPr algn="l"/>
             <a:r>
-              <a:rPr sz="1100" b="0">
+              <a:rPr sz="1100" b="0" i="1">
                 <a:solidFill>
                   <a:srgbClr val="808080"/>
                 </a:solidFill>
@@ -5491,8 +5557,8 @@
         </p:nvSpPr>
         <p:spPr>
           <a:xfrm>
-            <a:off x="457200" y="457200"/>
-            <a:ext cx="11277295" cy="822960"/>
+            <a:off x="457200" y="365760"/>
+            <a:ext cx="11277295" cy="914400"/>
           </a:xfrm>
           <a:prstGeom prst="rect">
             <a:avLst/>
@@ -5500,14 +5566,14 @@
           <a:noFill/>
         </p:spPr>
         <p:txBody>
-          <a:bodyPr wrap="square" lIns="45720" rIns="45720" tIns="18288" bIns="18288">
-            <a:spAutoFit/>
+          <a:bodyPr wrap="square" anchor="ctr" lIns="0" rIns="0" tIns="0" bIns="0">
+            <a:noAutofit/>
           </a:bodyPr>
           <a:lstStyle/>
           <a:p>
             <a:pPr algn="l"/>
             <a:r>
-              <a:rPr sz="3000" b="1">
+              <a:rPr sz="2800" b="1" i="0">
                 <a:solidFill>
                   <a:srgbClr val="1F4E78"/>
                 </a:solidFill>
@@ -5525,8 +5591,8 @@
         </p:nvSpPr>
         <p:spPr>
           <a:xfrm>
-            <a:off x="457200" y="1234440"/>
-            <a:ext cx="1828800" cy="36576"/>
+            <a:off x="457200" y="1298448"/>
+            <a:ext cx="2194560" cy="36576"/>
           </a:xfrm>
           <a:prstGeom prst="rect">
             <a:avLst/>
@@ -5568,8 +5634,8 @@
         </p:nvSpPr>
         <p:spPr>
           <a:xfrm>
-            <a:off x="457200" y="1463040"/>
-            <a:ext cx="11277295" cy="640080"/>
+            <a:off x="457200" y="1508760"/>
+            <a:ext cx="11277295" cy="502920"/>
           </a:xfrm>
           <a:prstGeom prst="rect">
             <a:avLst/>
@@ -5577,14 +5643,14 @@
           <a:noFill/>
         </p:spPr>
         <p:txBody>
-          <a:bodyPr wrap="square" lIns="45720" rIns="45720" tIns="18288" bIns="18288">
-            <a:spAutoFit/>
+          <a:bodyPr wrap="square" anchor="ctr" lIns="0" rIns="0" tIns="0" bIns="0">
+            <a:noAutofit/>
           </a:bodyPr>
           <a:lstStyle/>
           <a:p>
             <a:pPr algn="l"/>
             <a:r>
-              <a:rPr sz="2200" b="1">
+              <a:rPr sz="2000" b="1" i="0">
                 <a:solidFill>
                   <a:srgbClr val="C0392B"/>
                 </a:solidFill>
@@ -5602,8 +5668,8 @@
         </p:nvSpPr>
         <p:spPr>
           <a:xfrm>
-            <a:off x="640080" y="2286000"/>
-            <a:ext cx="10911535" cy="4069080"/>
+            <a:off x="640080" y="2148840"/>
+            <a:ext cx="10911535" cy="4114800"/>
           </a:xfrm>
           <a:prstGeom prst="rect">
             <a:avLst/>
@@ -5611,15 +5677,18 @@
           <a:noFill/>
         </p:spPr>
         <p:txBody>
-          <a:bodyPr wrap="square" lIns="45720" rIns="45720">
-            <a:spAutoFit/>
+          <a:bodyPr wrap="square" anchor="t" lIns="0" rIns="0" tIns="0" bIns="0">
+            <a:noAutofit/>
           </a:bodyPr>
           <a:lstStyle/>
           <a:p>
             <a:pPr algn="l">
               <a:lnSpc>
-                <a:spcPct val="130000"/>
+                <a:spcPct val="135000"/>
               </a:lnSpc>
+              <a:spcAft>
+                <a:spcPts val="600"/>
+              </a:spcAft>
             </a:pPr>
             <a:r>
               <a:rPr sz="1800">
@@ -5633,8 +5702,11 @@
           <a:p>
             <a:pPr algn="l">
               <a:lnSpc>
-                <a:spcPct val="130000"/>
+                <a:spcPct val="135000"/>
               </a:lnSpc>
+              <a:spcAft>
+                <a:spcPts val="600"/>
+              </a:spcAft>
             </a:pPr>
             <a:r>
               <a:rPr sz="1800">
@@ -5648,8 +5720,11 @@
           <a:p>
             <a:pPr algn="l">
               <a:lnSpc>
-                <a:spcPct val="130000"/>
+                <a:spcPct val="135000"/>
               </a:lnSpc>
+              <a:spcAft>
+                <a:spcPts val="600"/>
+              </a:spcAft>
             </a:pPr>
             <a:r>
               <a:rPr sz="1800">
@@ -5663,8 +5738,11 @@
           <a:p>
             <a:pPr algn="l">
               <a:lnSpc>
-                <a:spcPct val="130000"/>
+                <a:spcPct val="135000"/>
               </a:lnSpc>
+              <a:spcAft>
+                <a:spcPts val="600"/>
+              </a:spcAft>
             </a:pPr>
             <a:r>
               <a:rPr sz="1800">
@@ -5703,8 +5781,8 @@
         </p:nvSpPr>
         <p:spPr>
           <a:xfrm>
-            <a:off x="457200" y="457200"/>
-            <a:ext cx="11277295" cy="822960"/>
+            <a:off x="457200" y="365760"/>
+            <a:ext cx="11277295" cy="914400"/>
           </a:xfrm>
           <a:prstGeom prst="rect">
             <a:avLst/>
@@ -5712,14 +5790,14 @@
           <a:noFill/>
         </p:spPr>
         <p:txBody>
-          <a:bodyPr wrap="square" lIns="45720" rIns="45720" tIns="18288" bIns="18288">
-            <a:spAutoFit/>
+          <a:bodyPr wrap="square" anchor="ctr" lIns="0" rIns="0" tIns="0" bIns="0">
+            <a:noAutofit/>
           </a:bodyPr>
           <a:lstStyle/>
           <a:p>
             <a:pPr algn="l"/>
             <a:r>
-              <a:rPr sz="3000" b="1">
+              <a:rPr sz="2800" b="1" i="0">
                 <a:solidFill>
                   <a:srgbClr val="1F4E78"/>
                 </a:solidFill>
@@ -5737,8 +5815,8 @@
         </p:nvSpPr>
         <p:spPr>
           <a:xfrm>
-            <a:off x="457200" y="1234440"/>
-            <a:ext cx="1828800" cy="36576"/>
+            <a:off x="457200" y="1298448"/>
+            <a:ext cx="2194560" cy="36576"/>
           </a:xfrm>
           <a:prstGeom prst="rect">
             <a:avLst/>
@@ -5780,8 +5858,8 @@
         </p:nvSpPr>
         <p:spPr>
           <a:xfrm>
-            <a:off x="457200" y="1463040"/>
-            <a:ext cx="11277295" cy="640080"/>
+            <a:off x="457200" y="1508760"/>
+            <a:ext cx="11277295" cy="502920"/>
           </a:xfrm>
           <a:prstGeom prst="rect">
             <a:avLst/>
@@ -5789,14 +5867,14 @@
           <a:noFill/>
         </p:spPr>
         <p:txBody>
-          <a:bodyPr wrap="square" lIns="45720" rIns="45720" tIns="18288" bIns="18288">
-            <a:spAutoFit/>
+          <a:bodyPr wrap="square" anchor="ctr" lIns="0" rIns="0" tIns="0" bIns="0">
+            <a:noAutofit/>
           </a:bodyPr>
           <a:lstStyle/>
           <a:p>
             <a:pPr algn="l"/>
             <a:r>
-              <a:rPr sz="2200" b="1">
+              <a:rPr sz="2000" b="1" i="0">
                 <a:solidFill>
                   <a:srgbClr val="C0392B"/>
                 </a:solidFill>
@@ -5814,8 +5892,8 @@
         </p:nvSpPr>
         <p:spPr>
           <a:xfrm>
-            <a:off x="640080" y="2286000"/>
-            <a:ext cx="10911535" cy="4069080"/>
+            <a:off x="640080" y="2148840"/>
+            <a:ext cx="10911535" cy="4114800"/>
           </a:xfrm>
           <a:prstGeom prst="rect">
             <a:avLst/>
@@ -5823,15 +5901,18 @@
           <a:noFill/>
         </p:spPr>
         <p:txBody>
-          <a:bodyPr wrap="square" lIns="45720" rIns="45720">
-            <a:spAutoFit/>
+          <a:bodyPr wrap="square" anchor="t" lIns="0" rIns="0" tIns="0" bIns="0">
+            <a:noAutofit/>
           </a:bodyPr>
           <a:lstStyle/>
           <a:p>
             <a:pPr algn="l">
               <a:lnSpc>
-                <a:spcPct val="130000"/>
+                <a:spcPct val="135000"/>
               </a:lnSpc>
+              <a:spcAft>
+                <a:spcPts val="600"/>
+              </a:spcAft>
             </a:pPr>
             <a:r>
               <a:rPr sz="1800">
@@ -5845,8 +5926,11 @@
           <a:p>
             <a:pPr algn="l">
               <a:lnSpc>
-                <a:spcPct val="130000"/>
+                <a:spcPct val="135000"/>
               </a:lnSpc>
+              <a:spcAft>
+                <a:spcPts val="600"/>
+              </a:spcAft>
             </a:pPr>
             <a:r>
               <a:rPr sz="1800">
@@ -5860,8 +5944,11 @@
           <a:p>
             <a:pPr algn="l">
               <a:lnSpc>
-                <a:spcPct val="130000"/>
+                <a:spcPct val="135000"/>
               </a:lnSpc>
+              <a:spcAft>
+                <a:spcPts val="600"/>
+              </a:spcAft>
             </a:pPr>
             <a:r>
               <a:rPr sz="1800">
@@ -5900,8 +5987,8 @@
         </p:nvSpPr>
         <p:spPr>
           <a:xfrm>
-            <a:off x="457200" y="457200"/>
-            <a:ext cx="11277295" cy="822960"/>
+            <a:off x="457200" y="365760"/>
+            <a:ext cx="11277295" cy="914400"/>
           </a:xfrm>
           <a:prstGeom prst="rect">
             <a:avLst/>
@@ -5909,14 +5996,14 @@
           <a:noFill/>
         </p:spPr>
         <p:txBody>
-          <a:bodyPr wrap="square" lIns="45720" rIns="45720" tIns="18288" bIns="18288">
-            <a:spAutoFit/>
+          <a:bodyPr wrap="square" anchor="ctr" lIns="0" rIns="0" tIns="0" bIns="0">
+            <a:noAutofit/>
           </a:bodyPr>
           <a:lstStyle/>
           <a:p>
             <a:pPr algn="l"/>
             <a:r>
-              <a:rPr sz="3000" b="1">
+              <a:rPr sz="2800" b="1" i="0">
                 <a:solidFill>
                   <a:srgbClr val="1F4E78"/>
                 </a:solidFill>
@@ -5934,8 +6021,8 @@
         </p:nvSpPr>
         <p:spPr>
           <a:xfrm>
-            <a:off x="457200" y="1234440"/>
-            <a:ext cx="1828800" cy="36576"/>
+            <a:off x="457200" y="1298448"/>
+            <a:ext cx="2194560" cy="36576"/>
           </a:xfrm>
           <a:prstGeom prst="rect">
             <a:avLst/>
@@ -5977,8 +6064,8 @@
         </p:nvSpPr>
         <p:spPr>
           <a:xfrm>
-            <a:off x="457200" y="1463040"/>
-            <a:ext cx="11277295" cy="640080"/>
+            <a:off x="457200" y="1508760"/>
+            <a:ext cx="11277295" cy="502920"/>
           </a:xfrm>
           <a:prstGeom prst="rect">
             <a:avLst/>
@@ -5986,14 +6073,14 @@
           <a:noFill/>
         </p:spPr>
         <p:txBody>
-          <a:bodyPr wrap="square" lIns="45720" rIns="45720" tIns="18288" bIns="18288">
-            <a:spAutoFit/>
+          <a:bodyPr wrap="square" anchor="ctr" lIns="0" rIns="0" tIns="0" bIns="0">
+            <a:noAutofit/>
           </a:bodyPr>
           <a:lstStyle/>
           <a:p>
             <a:pPr algn="l"/>
             <a:r>
-              <a:rPr sz="2200" b="1">
+              <a:rPr sz="2000" b="1" i="0">
                 <a:solidFill>
                   <a:srgbClr val="C0392B"/>
                 </a:solidFill>
@@ -6012,7 +6099,7 @@
           <p:nvPr/>
         </p:nvGraphicFramePr>
         <p:xfrm>
-          <a:off x="457200" y="2286000"/>
+          <a:off x="457200" y="2148840"/>
           <a:ext cx="11277295" cy="1828800"/>
         </p:xfrm>
         <a:graphic>
@@ -6239,8 +6326,8 @@
         </p:nvSpPr>
         <p:spPr>
           <a:xfrm>
-            <a:off x="457200" y="457200"/>
-            <a:ext cx="11277295" cy="822960"/>
+            <a:off x="457200" y="365760"/>
+            <a:ext cx="11277295" cy="914400"/>
           </a:xfrm>
           <a:prstGeom prst="rect">
             <a:avLst/>
@@ -6248,14 +6335,14 @@
           <a:noFill/>
         </p:spPr>
         <p:txBody>
-          <a:bodyPr wrap="square" lIns="45720" rIns="45720" tIns="18288" bIns="18288">
-            <a:spAutoFit/>
+          <a:bodyPr wrap="square" anchor="ctr" lIns="0" rIns="0" tIns="0" bIns="0">
+            <a:noAutofit/>
           </a:bodyPr>
           <a:lstStyle/>
           <a:p>
             <a:pPr algn="l"/>
             <a:r>
-              <a:rPr sz="3000" b="1">
+              <a:rPr sz="2800" b="1" i="0">
                 <a:solidFill>
                   <a:srgbClr val="1F4E78"/>
                 </a:solidFill>
@@ -6273,8 +6360,8 @@
         </p:nvSpPr>
         <p:spPr>
           <a:xfrm>
-            <a:off x="457200" y="1234440"/>
-            <a:ext cx="1828800" cy="36576"/>
+            <a:off x="457200" y="1298448"/>
+            <a:ext cx="2194560" cy="36576"/>
           </a:xfrm>
           <a:prstGeom prst="rect">
             <a:avLst/>
@@ -6316,8 +6403,8 @@
         </p:nvSpPr>
         <p:spPr>
           <a:xfrm>
-            <a:off x="457200" y="1463040"/>
-            <a:ext cx="11277295" cy="640080"/>
+            <a:off x="457200" y="1508760"/>
+            <a:ext cx="11277295" cy="502920"/>
           </a:xfrm>
           <a:prstGeom prst="rect">
             <a:avLst/>
@@ -6325,14 +6412,14 @@
           <a:noFill/>
         </p:spPr>
         <p:txBody>
-          <a:bodyPr wrap="square" lIns="45720" rIns="45720" tIns="18288" bIns="18288">
-            <a:spAutoFit/>
+          <a:bodyPr wrap="square" anchor="ctr" lIns="0" rIns="0" tIns="0" bIns="0">
+            <a:noAutofit/>
           </a:bodyPr>
           <a:lstStyle/>
           <a:p>
             <a:pPr algn="l"/>
             <a:r>
-              <a:rPr sz="2200" b="1">
+              <a:rPr sz="2000" b="1" i="0">
                 <a:solidFill>
                   <a:srgbClr val="C0392B"/>
                 </a:solidFill>
@@ -6350,8 +6437,8 @@
         </p:nvSpPr>
         <p:spPr>
           <a:xfrm>
-            <a:off x="640080" y="2286000"/>
-            <a:ext cx="10911535" cy="4069080"/>
+            <a:off x="640080" y="2148840"/>
+            <a:ext cx="10911535" cy="4114800"/>
           </a:xfrm>
           <a:prstGeom prst="rect">
             <a:avLst/>
@@ -6359,15 +6446,18 @@
           <a:noFill/>
         </p:spPr>
         <p:txBody>
-          <a:bodyPr wrap="square" lIns="45720" rIns="45720">
-            <a:spAutoFit/>
+          <a:bodyPr wrap="square" anchor="t" lIns="0" rIns="0" tIns="0" bIns="0">
+            <a:noAutofit/>
           </a:bodyPr>
           <a:lstStyle/>
           <a:p>
             <a:pPr algn="l">
               <a:lnSpc>
-                <a:spcPct val="130000"/>
+                <a:spcPct val="135000"/>
               </a:lnSpc>
+              <a:spcAft>
+                <a:spcPts val="600"/>
+              </a:spcAft>
             </a:pPr>
             <a:r>
               <a:rPr sz="1800">
@@ -6381,8 +6471,11 @@
           <a:p>
             <a:pPr algn="l">
               <a:lnSpc>
-                <a:spcPct val="130000"/>
+                <a:spcPct val="135000"/>
               </a:lnSpc>
+              <a:spcAft>
+                <a:spcPts val="600"/>
+              </a:spcAft>
             </a:pPr>
             <a:r>
               <a:rPr sz="1800">
@@ -6396,8 +6489,11 @@
           <a:p>
             <a:pPr algn="l">
               <a:lnSpc>
-                <a:spcPct val="130000"/>
+                <a:spcPct val="135000"/>
               </a:lnSpc>
+              <a:spcAft>
+                <a:spcPts val="600"/>
+              </a:spcAft>
             </a:pPr>
             <a:r>
               <a:rPr sz="1800">
@@ -6411,8 +6507,11 @@
           <a:p>
             <a:pPr algn="l">
               <a:lnSpc>
-                <a:spcPct val="130000"/>
+                <a:spcPct val="135000"/>
               </a:lnSpc>
+              <a:spcAft>
+                <a:spcPts val="600"/>
+              </a:spcAft>
             </a:pPr>
             <a:r>
               <a:rPr sz="1800">
@@ -6451,8 +6550,8 @@
         </p:nvSpPr>
         <p:spPr>
           <a:xfrm>
-            <a:off x="457200" y="457200"/>
-            <a:ext cx="11277295" cy="822960"/>
+            <a:off x="457200" y="365760"/>
+            <a:ext cx="11277295" cy="914400"/>
           </a:xfrm>
           <a:prstGeom prst="rect">
             <a:avLst/>
@@ -6460,14 +6559,14 @@
           <a:noFill/>
         </p:spPr>
         <p:txBody>
-          <a:bodyPr wrap="square" lIns="45720" rIns="45720" tIns="18288" bIns="18288">
-            <a:spAutoFit/>
+          <a:bodyPr wrap="square" anchor="ctr" lIns="0" rIns="0" tIns="0" bIns="0">
+            <a:noAutofit/>
           </a:bodyPr>
           <a:lstStyle/>
           <a:p>
             <a:pPr algn="l"/>
             <a:r>
-              <a:rPr sz="3000" b="1">
+              <a:rPr sz="2800" b="1" i="0">
                 <a:solidFill>
                   <a:srgbClr val="1F4E78"/>
                 </a:solidFill>
@@ -6485,8 +6584,8 @@
         </p:nvSpPr>
         <p:spPr>
           <a:xfrm>
-            <a:off x="457200" y="1234440"/>
-            <a:ext cx="1828800" cy="36576"/>
+            <a:off x="457200" y="1298448"/>
+            <a:ext cx="2194560" cy="36576"/>
           </a:xfrm>
           <a:prstGeom prst="rect">
             <a:avLst/>
@@ -6528,8 +6627,8 @@
         </p:nvSpPr>
         <p:spPr>
           <a:xfrm>
-            <a:off x="457200" y="1463040"/>
-            <a:ext cx="11277295" cy="640080"/>
+            <a:off x="457200" y="1508760"/>
+            <a:ext cx="11277295" cy="502920"/>
           </a:xfrm>
           <a:prstGeom prst="rect">
             <a:avLst/>
@@ -6537,14 +6636,14 @@
           <a:noFill/>
         </p:spPr>
         <p:txBody>
-          <a:bodyPr wrap="square" lIns="45720" rIns="45720" tIns="18288" bIns="18288">
-            <a:spAutoFit/>
+          <a:bodyPr wrap="square" anchor="ctr" lIns="0" rIns="0" tIns="0" bIns="0">
+            <a:noAutofit/>
           </a:bodyPr>
           <a:lstStyle/>
           <a:p>
             <a:pPr algn="l"/>
             <a:r>
-              <a:rPr sz="2200" b="1">
+              <a:rPr sz="2000" b="1" i="0">
                 <a:solidFill>
                   <a:srgbClr val="C0392B"/>
                 </a:solidFill>
@@ -6562,8 +6661,8 @@
         </p:nvSpPr>
         <p:spPr>
           <a:xfrm>
-            <a:off x="640080" y="2286000"/>
-            <a:ext cx="10911535" cy="4069080"/>
+            <a:off x="640080" y="2148840"/>
+            <a:ext cx="10911535" cy="4114800"/>
           </a:xfrm>
           <a:prstGeom prst="rect">
             <a:avLst/>
@@ -6571,15 +6670,18 @@
           <a:noFill/>
         </p:spPr>
         <p:txBody>
-          <a:bodyPr wrap="square" lIns="45720" rIns="45720">
-            <a:spAutoFit/>
+          <a:bodyPr wrap="square" anchor="t" lIns="0" rIns="0" tIns="0" bIns="0">
+            <a:noAutofit/>
           </a:bodyPr>
           <a:lstStyle/>
           <a:p>
             <a:pPr algn="l">
               <a:lnSpc>
-                <a:spcPct val="130000"/>
+                <a:spcPct val="135000"/>
               </a:lnSpc>
+              <a:spcAft>
+                <a:spcPts val="600"/>
+              </a:spcAft>
             </a:pPr>
             <a:r>
               <a:rPr sz="1800">
@@ -6593,8 +6695,11 @@
           <a:p>
             <a:pPr algn="l">
               <a:lnSpc>
-                <a:spcPct val="130000"/>
+                <a:spcPct val="135000"/>
               </a:lnSpc>
+              <a:spcAft>
+                <a:spcPts val="600"/>
+              </a:spcAft>
             </a:pPr>
             <a:r>
               <a:rPr sz="1800">
@@ -6608,8 +6713,11 @@
           <a:p>
             <a:pPr algn="l">
               <a:lnSpc>
-                <a:spcPct val="130000"/>
+                <a:spcPct val="135000"/>
               </a:lnSpc>
+              <a:spcAft>
+                <a:spcPts val="600"/>
+              </a:spcAft>
             </a:pPr>
             <a:r>
               <a:rPr sz="1800">
@@ -6623,8 +6731,11 @@
           <a:p>
             <a:pPr algn="l">
               <a:lnSpc>
-                <a:spcPct val="130000"/>
+                <a:spcPct val="135000"/>
               </a:lnSpc>
+              <a:spcAft>
+                <a:spcPts val="600"/>
+              </a:spcAft>
             </a:pPr>
             <a:r>
               <a:rPr sz="1800">
@@ -6663,8 +6774,8 @@
         </p:nvSpPr>
         <p:spPr>
           <a:xfrm>
-            <a:off x="457200" y="457200"/>
-            <a:ext cx="11277295" cy="822960"/>
+            <a:off x="457200" y="365760"/>
+            <a:ext cx="11277295" cy="914400"/>
           </a:xfrm>
           <a:prstGeom prst="rect">
             <a:avLst/>
@@ -6672,14 +6783,14 @@
           <a:noFill/>
         </p:spPr>
         <p:txBody>
-          <a:bodyPr wrap="square" lIns="45720" rIns="45720" tIns="18288" bIns="18288">
-            <a:spAutoFit/>
+          <a:bodyPr wrap="square" anchor="ctr" lIns="0" rIns="0" tIns="0" bIns="0">
+            <a:noAutofit/>
           </a:bodyPr>
           <a:lstStyle/>
           <a:p>
             <a:pPr algn="l"/>
             <a:r>
-              <a:rPr sz="3000" b="1">
+              <a:rPr sz="2800" b="1" i="0">
                 <a:solidFill>
                   <a:srgbClr val="1F4E78"/>
                 </a:solidFill>
@@ -6697,8 +6808,8 @@
         </p:nvSpPr>
         <p:spPr>
           <a:xfrm>
-            <a:off x="457200" y="1234440"/>
-            <a:ext cx="1828800" cy="36576"/>
+            <a:off x="457200" y="1298448"/>
+            <a:ext cx="2194560" cy="36576"/>
           </a:xfrm>
           <a:prstGeom prst="rect">
             <a:avLst/>
@@ -6740,8 +6851,8 @@
         </p:nvSpPr>
         <p:spPr>
           <a:xfrm>
-            <a:off x="457200" y="1463040"/>
-            <a:ext cx="11277295" cy="640080"/>
+            <a:off x="457200" y="1508760"/>
+            <a:ext cx="11277295" cy="502920"/>
           </a:xfrm>
           <a:prstGeom prst="rect">
             <a:avLst/>
@@ -6749,14 +6860,14 @@
           <a:noFill/>
         </p:spPr>
         <p:txBody>
-          <a:bodyPr wrap="square" lIns="45720" rIns="45720" tIns="18288" bIns="18288">
-            <a:spAutoFit/>
+          <a:bodyPr wrap="square" anchor="ctr" lIns="0" rIns="0" tIns="0" bIns="0">
+            <a:noAutofit/>
           </a:bodyPr>
           <a:lstStyle/>
           <a:p>
             <a:pPr algn="l"/>
             <a:r>
-              <a:rPr sz="2200" b="1">
+              <a:rPr sz="2000" b="1" i="0">
                 <a:solidFill>
                   <a:srgbClr val="C0392B"/>
                 </a:solidFill>
@@ -6774,8 +6885,8 @@
         </p:nvSpPr>
         <p:spPr>
           <a:xfrm>
-            <a:off x="640080" y="2286000"/>
-            <a:ext cx="10911535" cy="4069080"/>
+            <a:off x="640080" y="2148840"/>
+            <a:ext cx="10911535" cy="4114800"/>
           </a:xfrm>
           <a:prstGeom prst="rect">
             <a:avLst/>
@@ -6783,15 +6894,18 @@
           <a:noFill/>
         </p:spPr>
         <p:txBody>
-          <a:bodyPr wrap="square" lIns="45720" rIns="45720">
-            <a:spAutoFit/>
+          <a:bodyPr wrap="square" anchor="t" lIns="0" rIns="0" tIns="0" bIns="0">
+            <a:noAutofit/>
           </a:bodyPr>
           <a:lstStyle/>
           <a:p>
             <a:pPr algn="l">
               <a:lnSpc>
-                <a:spcPct val="130000"/>
+                <a:spcPct val="135000"/>
               </a:lnSpc>
+              <a:spcAft>
+                <a:spcPts val="600"/>
+              </a:spcAft>
             </a:pPr>
             <a:r>
               <a:rPr sz="1800">
@@ -6805,8 +6919,11 @@
           <a:p>
             <a:pPr algn="l">
               <a:lnSpc>
-                <a:spcPct val="130000"/>
+                <a:spcPct val="135000"/>
               </a:lnSpc>
+              <a:spcAft>
+                <a:spcPts val="600"/>
+              </a:spcAft>
             </a:pPr>
             <a:r>
               <a:rPr sz="1800">
@@ -6820,8 +6937,11 @@
           <a:p>
             <a:pPr algn="l">
               <a:lnSpc>
-                <a:spcPct val="130000"/>
+                <a:spcPct val="135000"/>
               </a:lnSpc>
+              <a:spcAft>
+                <a:spcPts val="600"/>
+              </a:spcAft>
             </a:pPr>
             <a:r>
               <a:rPr sz="1800">
@@ -6835,8 +6955,11 @@
           <a:p>
             <a:pPr algn="l">
               <a:lnSpc>
-                <a:spcPct val="130000"/>
+                <a:spcPct val="135000"/>
               </a:lnSpc>
+              <a:spcAft>
+                <a:spcPts val="600"/>
+              </a:spcAft>
             </a:pPr>
             <a:r>
               <a:rPr sz="1800">
@@ -6875,8 +6998,8 @@
         </p:nvSpPr>
         <p:spPr>
           <a:xfrm>
-            <a:off x="457200" y="457200"/>
-            <a:ext cx="11277295" cy="822960"/>
+            <a:off x="457200" y="365760"/>
+            <a:ext cx="11277295" cy="914400"/>
           </a:xfrm>
           <a:prstGeom prst="rect">
             <a:avLst/>
@@ -6884,14 +7007,14 @@
           <a:noFill/>
         </p:spPr>
         <p:txBody>
-          <a:bodyPr wrap="square" lIns="45720" rIns="45720" tIns="18288" bIns="18288">
-            <a:spAutoFit/>
+          <a:bodyPr wrap="square" anchor="ctr" lIns="0" rIns="0" tIns="0" bIns="0">
+            <a:noAutofit/>
           </a:bodyPr>
           <a:lstStyle/>
           <a:p>
             <a:pPr algn="l"/>
             <a:r>
-              <a:rPr sz="3000" b="1">
+              <a:rPr sz="2800" b="1" i="0">
                 <a:solidFill>
                   <a:srgbClr val="1F4E78"/>
                 </a:solidFill>
@@ -6909,8 +7032,8 @@
         </p:nvSpPr>
         <p:spPr>
           <a:xfrm>
-            <a:off x="457200" y="1234440"/>
-            <a:ext cx="1828800" cy="36576"/>
+            <a:off x="457200" y="1298448"/>
+            <a:ext cx="2194560" cy="36576"/>
           </a:xfrm>
           <a:prstGeom prst="rect">
             <a:avLst/>
@@ -6952,8 +7075,8 @@
         </p:nvSpPr>
         <p:spPr>
           <a:xfrm>
-            <a:off x="457200" y="1463040"/>
-            <a:ext cx="11277295" cy="640080"/>
+            <a:off x="457200" y="1508760"/>
+            <a:ext cx="11277295" cy="502920"/>
           </a:xfrm>
           <a:prstGeom prst="rect">
             <a:avLst/>
@@ -6961,14 +7084,14 @@
           <a:noFill/>
         </p:spPr>
         <p:txBody>
-          <a:bodyPr wrap="square" lIns="45720" rIns="45720" tIns="18288" bIns="18288">
-            <a:spAutoFit/>
+          <a:bodyPr wrap="square" anchor="ctr" lIns="0" rIns="0" tIns="0" bIns="0">
+            <a:noAutofit/>
           </a:bodyPr>
           <a:lstStyle/>
           <a:p>
             <a:pPr algn="l"/>
             <a:r>
-              <a:rPr sz="2200" b="1">
+              <a:rPr sz="2000" b="1" i="0">
                 <a:solidFill>
                   <a:srgbClr val="C0392B"/>
                 </a:solidFill>
@@ -6986,8 +7109,8 @@
         </p:nvSpPr>
         <p:spPr>
           <a:xfrm>
-            <a:off x="640080" y="2286000"/>
-            <a:ext cx="10911535" cy="4069080"/>
+            <a:off x="640080" y="2148840"/>
+            <a:ext cx="10911535" cy="4114800"/>
           </a:xfrm>
           <a:prstGeom prst="rect">
             <a:avLst/>
@@ -6995,15 +7118,18 @@
           <a:noFill/>
         </p:spPr>
         <p:txBody>
-          <a:bodyPr wrap="square" lIns="45720" rIns="45720">
-            <a:spAutoFit/>
+          <a:bodyPr wrap="square" anchor="t" lIns="0" rIns="0" tIns="0" bIns="0">
+            <a:noAutofit/>
           </a:bodyPr>
           <a:lstStyle/>
           <a:p>
             <a:pPr algn="l">
               <a:lnSpc>
-                <a:spcPct val="130000"/>
+                <a:spcPct val="135000"/>
               </a:lnSpc>
+              <a:spcAft>
+                <a:spcPts val="600"/>
+              </a:spcAft>
             </a:pPr>
             <a:r>
               <a:rPr sz="1800">
@@ -7017,8 +7143,11 @@
           <a:p>
             <a:pPr algn="l">
               <a:lnSpc>
-                <a:spcPct val="130000"/>
+                <a:spcPct val="135000"/>
               </a:lnSpc>
+              <a:spcAft>
+                <a:spcPts val="600"/>
+              </a:spcAft>
             </a:pPr>
             <a:r>
               <a:rPr sz="1800">
@@ -7032,8 +7161,11 @@
           <a:p>
             <a:pPr algn="l">
               <a:lnSpc>
-                <a:spcPct val="130000"/>
+                <a:spcPct val="135000"/>
               </a:lnSpc>
+              <a:spcAft>
+                <a:spcPts val="600"/>
+              </a:spcAft>
             </a:pPr>
             <a:r>
               <a:rPr sz="1800">
@@ -7047,8 +7179,11 @@
           <a:p>
             <a:pPr algn="l">
               <a:lnSpc>
-                <a:spcPct val="130000"/>
+                <a:spcPct val="135000"/>
               </a:lnSpc>
+              <a:spcAft>
+                <a:spcPts val="600"/>
+              </a:spcAft>
             </a:pPr>
             <a:r>
               <a:rPr sz="1800">
@@ -7087,8 +7222,8 @@
         </p:nvSpPr>
         <p:spPr>
           <a:xfrm>
-            <a:off x="457200" y="457200"/>
-            <a:ext cx="11277295" cy="822960"/>
+            <a:off x="457200" y="365760"/>
+            <a:ext cx="11277295" cy="914400"/>
           </a:xfrm>
           <a:prstGeom prst="rect">
             <a:avLst/>
@@ -7096,14 +7231,14 @@
           <a:noFill/>
         </p:spPr>
         <p:txBody>
-          <a:bodyPr wrap="square" lIns="45720" rIns="45720" tIns="18288" bIns="18288">
-            <a:spAutoFit/>
+          <a:bodyPr wrap="square" anchor="ctr" lIns="0" rIns="0" tIns="0" bIns="0">
+            <a:noAutofit/>
           </a:bodyPr>
           <a:lstStyle/>
           <a:p>
             <a:pPr algn="l"/>
             <a:r>
-              <a:rPr sz="3000" b="1">
+              <a:rPr sz="2800" b="1" i="0">
                 <a:solidFill>
                   <a:srgbClr val="1F4E78"/>
                 </a:solidFill>
@@ -7121,8 +7256,8 @@
         </p:nvSpPr>
         <p:spPr>
           <a:xfrm>
-            <a:off x="457200" y="1234440"/>
-            <a:ext cx="1828800" cy="36576"/>
+            <a:off x="457200" y="1298448"/>
+            <a:ext cx="2194560" cy="36576"/>
           </a:xfrm>
           <a:prstGeom prst="rect">
             <a:avLst/>
@@ -7164,8 +7299,8 @@
         </p:nvSpPr>
         <p:spPr>
           <a:xfrm>
-            <a:off x="822960" y="1463040"/>
-            <a:ext cx="10545775" cy="4892040"/>
+            <a:off x="822960" y="2148840"/>
+            <a:ext cx="10545775" cy="4114800"/>
           </a:xfrm>
           <a:prstGeom prst="rect">
             <a:avLst/>
@@ -7173,15 +7308,18 @@
           <a:noFill/>
         </p:spPr>
         <p:txBody>
-          <a:bodyPr wrap="square" lIns="45720" rIns="45720">
-            <a:spAutoFit/>
+          <a:bodyPr wrap="square" anchor="t" lIns="0" rIns="0" tIns="0" bIns="0">
+            <a:noAutofit/>
           </a:bodyPr>
           <a:lstStyle/>
           <a:p>
             <a:pPr algn="l">
               <a:lnSpc>
-                <a:spcPct val="130000"/>
+                <a:spcPct val="135000"/>
               </a:lnSpc>
+              <a:spcAft>
+                <a:spcPts val="600"/>
+              </a:spcAft>
             </a:pPr>
             <a:r>
               <a:rPr sz="2200">
@@ -7272,14 +7410,14 @@
           <a:noFill/>
         </p:spPr>
         <p:txBody>
-          <a:bodyPr wrap="square" lIns="45720" rIns="45720" tIns="18288" bIns="18288">
-            <a:spAutoFit/>
+          <a:bodyPr wrap="square" anchor="ctr" lIns="0" rIns="0" tIns="0" bIns="0">
+            <a:noAutofit/>
           </a:bodyPr>
           <a:lstStyle/>
           <a:p>
             <a:pPr algn="ctr"/>
             <a:r>
-              <a:rPr sz="5800" b="1">
+              <a:rPr sz="5800" b="1" i="0">
                 <a:solidFill>
                   <a:srgbClr val="FFFFFF"/>
                 </a:solidFill>
@@ -7315,8 +7453,8 @@
         </p:nvSpPr>
         <p:spPr>
           <a:xfrm>
-            <a:off x="457200" y="457200"/>
-            <a:ext cx="11277295" cy="822960"/>
+            <a:off x="457200" y="365760"/>
+            <a:ext cx="11277295" cy="914400"/>
           </a:xfrm>
           <a:prstGeom prst="rect">
             <a:avLst/>
@@ -7324,14 +7462,14 @@
           <a:noFill/>
         </p:spPr>
         <p:txBody>
-          <a:bodyPr wrap="square" lIns="45720" rIns="45720" tIns="18288" bIns="18288">
-            <a:spAutoFit/>
+          <a:bodyPr wrap="square" anchor="ctr" lIns="0" rIns="0" tIns="0" bIns="0">
+            <a:noAutofit/>
           </a:bodyPr>
           <a:lstStyle/>
           <a:p>
             <a:pPr algn="l"/>
             <a:r>
-              <a:rPr sz="3000" b="1">
+              <a:rPr sz="2800" b="1" i="0">
                 <a:solidFill>
                   <a:srgbClr val="1F4E78"/>
                 </a:solidFill>
@@ -7349,8 +7487,8 @@
         </p:nvSpPr>
         <p:spPr>
           <a:xfrm>
-            <a:off x="457200" y="1234440"/>
-            <a:ext cx="1828800" cy="36576"/>
+            <a:off x="457200" y="1298448"/>
+            <a:ext cx="2194560" cy="36576"/>
           </a:xfrm>
           <a:prstGeom prst="rect">
             <a:avLst/>
@@ -7392,8 +7530,8 @@
         </p:nvSpPr>
         <p:spPr>
           <a:xfrm>
-            <a:off x="457200" y="1463040"/>
-            <a:ext cx="11277295" cy="640080"/>
+            <a:off x="457200" y="1508760"/>
+            <a:ext cx="11277295" cy="502920"/>
           </a:xfrm>
           <a:prstGeom prst="rect">
             <a:avLst/>
@@ -7401,14 +7539,14 @@
           <a:noFill/>
         </p:spPr>
         <p:txBody>
-          <a:bodyPr wrap="square" lIns="45720" rIns="45720" tIns="18288" bIns="18288">
-            <a:spAutoFit/>
+          <a:bodyPr wrap="square" anchor="ctr" lIns="0" rIns="0" tIns="0" bIns="0">
+            <a:noAutofit/>
           </a:bodyPr>
           <a:lstStyle/>
           <a:p>
             <a:pPr algn="l"/>
             <a:r>
-              <a:rPr sz="2200" b="1">
+              <a:rPr sz="2000" b="1" i="0">
                 <a:solidFill>
                   <a:srgbClr val="C0392B"/>
                 </a:solidFill>
@@ -7427,7 +7565,7 @@
           <p:nvPr/>
         </p:nvGraphicFramePr>
         <p:xfrm>
-          <a:off x="457200" y="2286000"/>
+          <a:off x="457200" y="2148840"/>
           <a:ext cx="11277295" cy="2286000"/>
         </p:xfrm>
         <a:graphic>
@@ -8024,14 +8162,14 @@
           <a:noFill/>
         </p:spPr>
         <p:txBody>
-          <a:bodyPr wrap="square" lIns="45720" rIns="45720" tIns="18288" bIns="18288">
-            <a:spAutoFit/>
+          <a:bodyPr wrap="square" anchor="ctr" lIns="0" rIns="0" tIns="0" bIns="0">
+            <a:noAutofit/>
           </a:bodyPr>
           <a:lstStyle/>
           <a:p>
             <a:pPr algn="l"/>
             <a:r>
-              <a:rPr sz="1100" b="0">
+              <a:rPr sz="1100" b="0" i="1">
                 <a:solidFill>
                   <a:srgbClr val="808080"/>
                 </a:solidFill>
@@ -8067,8 +8205,8 @@
         </p:nvSpPr>
         <p:spPr>
           <a:xfrm>
-            <a:off x="457200" y="457200"/>
-            <a:ext cx="11277295" cy="822960"/>
+            <a:off x="457200" y="365760"/>
+            <a:ext cx="11277295" cy="914400"/>
           </a:xfrm>
           <a:prstGeom prst="rect">
             <a:avLst/>
@@ -8076,14 +8214,14 @@
           <a:noFill/>
         </p:spPr>
         <p:txBody>
-          <a:bodyPr wrap="square" lIns="45720" rIns="45720" tIns="18288" bIns="18288">
-            <a:spAutoFit/>
+          <a:bodyPr wrap="square" anchor="ctr" lIns="0" rIns="0" tIns="0" bIns="0">
+            <a:noAutofit/>
           </a:bodyPr>
           <a:lstStyle/>
           <a:p>
             <a:pPr algn="l"/>
             <a:r>
-              <a:rPr sz="3000" b="1">
+              <a:rPr sz="2800" b="1" i="0">
                 <a:solidFill>
                   <a:srgbClr val="1F4E78"/>
                 </a:solidFill>
@@ -8101,8 +8239,8 @@
         </p:nvSpPr>
         <p:spPr>
           <a:xfrm>
-            <a:off x="457200" y="1234440"/>
-            <a:ext cx="1828800" cy="36576"/>
+            <a:off x="457200" y="1298448"/>
+            <a:ext cx="2194560" cy="36576"/>
           </a:xfrm>
           <a:prstGeom prst="rect">
             <a:avLst/>
@@ -8144,8 +8282,8 @@
         </p:nvSpPr>
         <p:spPr>
           <a:xfrm>
-            <a:off x="457200" y="1463040"/>
-            <a:ext cx="11277295" cy="640080"/>
+            <a:off x="457200" y="1508760"/>
+            <a:ext cx="11277295" cy="502920"/>
           </a:xfrm>
           <a:prstGeom prst="rect">
             <a:avLst/>
@@ -8153,14 +8291,14 @@
           <a:noFill/>
         </p:spPr>
         <p:txBody>
-          <a:bodyPr wrap="square" lIns="45720" rIns="45720" tIns="18288" bIns="18288">
-            <a:spAutoFit/>
+          <a:bodyPr wrap="square" anchor="ctr" lIns="0" rIns="0" tIns="0" bIns="0">
+            <a:noAutofit/>
           </a:bodyPr>
           <a:lstStyle/>
           <a:p>
             <a:pPr algn="l"/>
             <a:r>
-              <a:rPr sz="2200" b="1">
+              <a:rPr sz="2000" b="1" i="0">
                 <a:solidFill>
                   <a:srgbClr val="C0392B"/>
                 </a:solidFill>
@@ -8178,8 +8316,8 @@
         </p:nvSpPr>
         <p:spPr>
           <a:xfrm>
-            <a:off x="731520" y="2286000"/>
-            <a:ext cx="10728655" cy="3977640"/>
+            <a:off x="731520" y="2148840"/>
+            <a:ext cx="10728655" cy="4114800"/>
           </a:xfrm>
           <a:prstGeom prst="rect">
             <a:avLst/>
@@ -8187,8 +8325,8 @@
           <a:noFill/>
         </p:spPr>
         <p:txBody>
-          <a:bodyPr wrap="none" tIns="91440">
-            <a:spAutoFit/>
+          <a:bodyPr wrap="none" anchor="t" tIns="91440">
+            <a:noAutofit/>
           </a:bodyPr>
           <a:lstStyle/>
           <a:p>
@@ -8241,8 +8379,8 @@
         </p:nvSpPr>
         <p:spPr>
           <a:xfrm>
-            <a:off x="457200" y="457200"/>
-            <a:ext cx="11277295" cy="822960"/>
+            <a:off x="457200" y="365760"/>
+            <a:ext cx="11277295" cy="914400"/>
           </a:xfrm>
           <a:prstGeom prst="rect">
             <a:avLst/>
@@ -8250,14 +8388,14 @@
           <a:noFill/>
         </p:spPr>
         <p:txBody>
-          <a:bodyPr wrap="square" lIns="45720" rIns="45720" tIns="18288" bIns="18288">
-            <a:spAutoFit/>
+          <a:bodyPr wrap="square" anchor="ctr" lIns="0" rIns="0" tIns="0" bIns="0">
+            <a:noAutofit/>
           </a:bodyPr>
           <a:lstStyle/>
           <a:p>
             <a:pPr algn="l"/>
             <a:r>
-              <a:rPr sz="3000" b="1">
+              <a:rPr sz="2800" b="1" i="0">
                 <a:solidFill>
                   <a:srgbClr val="1F4E78"/>
                 </a:solidFill>
@@ -8275,8 +8413,8 @@
         </p:nvSpPr>
         <p:spPr>
           <a:xfrm>
-            <a:off x="457200" y="1234440"/>
-            <a:ext cx="1828800" cy="36576"/>
+            <a:off x="457200" y="1298448"/>
+            <a:ext cx="2194560" cy="36576"/>
           </a:xfrm>
           <a:prstGeom prst="rect">
             <a:avLst/>
@@ -8318,8 +8456,8 @@
         </p:nvSpPr>
         <p:spPr>
           <a:xfrm>
-            <a:off x="457200" y="1463040"/>
-            <a:ext cx="11277295" cy="640080"/>
+            <a:off x="457200" y="1508760"/>
+            <a:ext cx="11277295" cy="502920"/>
           </a:xfrm>
           <a:prstGeom prst="rect">
             <a:avLst/>
@@ -8327,14 +8465,14 @@
           <a:noFill/>
         </p:spPr>
         <p:txBody>
-          <a:bodyPr wrap="square" lIns="45720" rIns="45720" tIns="18288" bIns="18288">
-            <a:spAutoFit/>
+          <a:bodyPr wrap="square" anchor="ctr" lIns="0" rIns="0" tIns="0" bIns="0">
+            <a:noAutofit/>
           </a:bodyPr>
           <a:lstStyle/>
           <a:p>
             <a:pPr algn="l"/>
             <a:r>
-              <a:rPr sz="2200" b="1">
+              <a:rPr sz="2000" b="1" i="0">
                 <a:solidFill>
                   <a:srgbClr val="C0392B"/>
                 </a:solidFill>
@@ -8353,7 +8491,7 @@
           <p:nvPr/>
         </p:nvGraphicFramePr>
         <p:xfrm>
-          <a:off x="457200" y="2286000"/>
+          <a:off x="457200" y="2148840"/>
           <a:ext cx="11277295" cy="2286000"/>
         </p:xfrm>
         <a:graphic>
@@ -8950,14 +9088,14 @@
           <a:noFill/>
         </p:spPr>
         <p:txBody>
-          <a:bodyPr wrap="square" lIns="45720" rIns="45720" tIns="18288" bIns="18288">
-            <a:spAutoFit/>
+          <a:bodyPr wrap="square" anchor="ctr" lIns="0" rIns="0" tIns="0" bIns="0">
+            <a:noAutofit/>
           </a:bodyPr>
           <a:lstStyle/>
           <a:p>
             <a:pPr algn="l"/>
             <a:r>
-              <a:rPr sz="1100" b="0">
+              <a:rPr sz="1100" b="0" i="1">
                 <a:solidFill>
                   <a:srgbClr val="808080"/>
                 </a:solidFill>
@@ -8993,8 +9131,8 @@
         </p:nvSpPr>
         <p:spPr>
           <a:xfrm>
-            <a:off x="457200" y="457200"/>
-            <a:ext cx="11277295" cy="822960"/>
+            <a:off x="457200" y="365760"/>
+            <a:ext cx="11277295" cy="914400"/>
           </a:xfrm>
           <a:prstGeom prst="rect">
             <a:avLst/>
@@ -9002,14 +9140,14 @@
           <a:noFill/>
         </p:spPr>
         <p:txBody>
-          <a:bodyPr wrap="square" lIns="45720" rIns="45720" tIns="18288" bIns="18288">
-            <a:spAutoFit/>
+          <a:bodyPr wrap="square" anchor="ctr" lIns="0" rIns="0" tIns="0" bIns="0">
+            <a:noAutofit/>
           </a:bodyPr>
           <a:lstStyle/>
           <a:p>
             <a:pPr algn="l"/>
             <a:r>
-              <a:rPr sz="3000" b="1">
+              <a:rPr sz="2800" b="1" i="0">
                 <a:solidFill>
                   <a:srgbClr val="1F4E78"/>
                 </a:solidFill>
@@ -9027,8 +9165,8 @@
         </p:nvSpPr>
         <p:spPr>
           <a:xfrm>
-            <a:off x="457200" y="1234440"/>
-            <a:ext cx="1828800" cy="36576"/>
+            <a:off x="457200" y="1298448"/>
+            <a:ext cx="2194560" cy="36576"/>
           </a:xfrm>
           <a:prstGeom prst="rect">
             <a:avLst/>
@@ -9070,8 +9208,8 @@
         </p:nvSpPr>
         <p:spPr>
           <a:xfrm>
-            <a:off x="457200" y="1463040"/>
-            <a:ext cx="11277295" cy="640080"/>
+            <a:off x="457200" y="1508760"/>
+            <a:ext cx="11277295" cy="502920"/>
           </a:xfrm>
           <a:prstGeom prst="rect">
             <a:avLst/>
@@ -9079,14 +9217,14 @@
           <a:noFill/>
         </p:spPr>
         <p:txBody>
-          <a:bodyPr wrap="square" lIns="45720" rIns="45720" tIns="18288" bIns="18288">
-            <a:spAutoFit/>
+          <a:bodyPr wrap="square" anchor="ctr" lIns="0" rIns="0" tIns="0" bIns="0">
+            <a:noAutofit/>
           </a:bodyPr>
           <a:lstStyle/>
           <a:p>
             <a:pPr algn="l"/>
             <a:r>
-              <a:rPr sz="2200" b="1">
+              <a:rPr sz="2000" b="1" i="0">
                 <a:solidFill>
                   <a:srgbClr val="C0392B"/>
                 </a:solidFill>
@@ -9105,7 +9243,7 @@
           <p:nvPr/>
         </p:nvGraphicFramePr>
         <p:xfrm>
-          <a:off x="457200" y="2286000"/>
+          <a:off x="457200" y="2148840"/>
           <a:ext cx="11277295" cy="1828800"/>
         </p:xfrm>
         <a:graphic>
@@ -9501,14 +9639,14 @@
           <a:noFill/>
         </p:spPr>
         <p:txBody>
-          <a:bodyPr wrap="square" lIns="45720" rIns="45720" tIns="18288" bIns="18288">
-            <a:spAutoFit/>
+          <a:bodyPr wrap="square" anchor="ctr" lIns="0" rIns="0" tIns="0" bIns="0">
+            <a:noAutofit/>
           </a:bodyPr>
           <a:lstStyle/>
           <a:p>
             <a:pPr algn="l"/>
             <a:r>
-              <a:rPr sz="1100" b="0">
+              <a:rPr sz="1100" b="0" i="1">
                 <a:solidFill>
                   <a:srgbClr val="808080"/>
                 </a:solidFill>
@@ -9544,8 +9682,8 @@
         </p:nvSpPr>
         <p:spPr>
           <a:xfrm>
-            <a:off x="457200" y="457200"/>
-            <a:ext cx="11277295" cy="822960"/>
+            <a:off x="457200" y="365760"/>
+            <a:ext cx="11277295" cy="914400"/>
           </a:xfrm>
           <a:prstGeom prst="rect">
             <a:avLst/>
@@ -9553,14 +9691,14 @@
           <a:noFill/>
         </p:spPr>
         <p:txBody>
-          <a:bodyPr wrap="square" lIns="45720" rIns="45720" tIns="18288" bIns="18288">
-            <a:spAutoFit/>
+          <a:bodyPr wrap="square" anchor="ctr" lIns="0" rIns="0" tIns="0" bIns="0">
+            <a:noAutofit/>
           </a:bodyPr>
           <a:lstStyle/>
           <a:p>
             <a:pPr algn="l"/>
             <a:r>
-              <a:rPr sz="3000" b="1">
+              <a:rPr sz="2800" b="1" i="0">
                 <a:solidFill>
                   <a:srgbClr val="1F4E78"/>
                 </a:solidFill>
@@ -9578,8 +9716,8 @@
         </p:nvSpPr>
         <p:spPr>
           <a:xfrm>
-            <a:off x="457200" y="1234440"/>
-            <a:ext cx="1828800" cy="36576"/>
+            <a:off x="457200" y="1298448"/>
+            <a:ext cx="2194560" cy="36576"/>
           </a:xfrm>
           <a:prstGeom prst="rect">
             <a:avLst/>
@@ -9621,8 +9759,8 @@
         </p:nvSpPr>
         <p:spPr>
           <a:xfrm>
-            <a:off x="822960" y="1463040"/>
-            <a:ext cx="10545775" cy="4892040"/>
+            <a:off x="822960" y="2148840"/>
+            <a:ext cx="10545775" cy="4114800"/>
           </a:xfrm>
           <a:prstGeom prst="rect">
             <a:avLst/>
@@ -9630,15 +9768,18 @@
           <a:noFill/>
         </p:spPr>
         <p:txBody>
-          <a:bodyPr wrap="square" lIns="45720" rIns="45720">
-            <a:spAutoFit/>
+          <a:bodyPr wrap="square" anchor="t" lIns="0" rIns="0" tIns="0" bIns="0">
+            <a:noAutofit/>
           </a:bodyPr>
           <a:lstStyle/>
           <a:p>
             <a:pPr algn="l">
               <a:lnSpc>
-                <a:spcPct val="130000"/>
+                <a:spcPct val="135000"/>
               </a:lnSpc>
+              <a:spcAft>
+                <a:spcPts val="600"/>
+              </a:spcAft>
             </a:pPr>
             <a:r>
               <a:rPr sz="2200">
@@ -9729,14 +9870,14 @@
           <a:noFill/>
         </p:spPr>
         <p:txBody>
-          <a:bodyPr wrap="square" lIns="45720" rIns="45720" tIns="18288" bIns="18288">
-            <a:spAutoFit/>
+          <a:bodyPr wrap="square" anchor="ctr" lIns="0" rIns="0" tIns="0" bIns="0">
+            <a:noAutofit/>
           </a:bodyPr>
           <a:lstStyle/>
           <a:p>
             <a:pPr algn="ctr"/>
             <a:r>
-              <a:rPr sz="5800" b="1">
+              <a:rPr sz="5800" b="1" i="0">
                 <a:solidFill>
                   <a:srgbClr val="FFFFFF"/>
                 </a:solidFill>
@@ -9772,8 +9913,8 @@
         </p:nvSpPr>
         <p:spPr>
           <a:xfrm>
-            <a:off x="457200" y="457200"/>
-            <a:ext cx="11277295" cy="822960"/>
+            <a:off x="457200" y="365760"/>
+            <a:ext cx="11277295" cy="914400"/>
           </a:xfrm>
           <a:prstGeom prst="rect">
             <a:avLst/>
@@ -9781,14 +9922,14 @@
           <a:noFill/>
         </p:spPr>
         <p:txBody>
-          <a:bodyPr wrap="square" lIns="45720" rIns="45720" tIns="18288" bIns="18288">
-            <a:spAutoFit/>
+          <a:bodyPr wrap="square" anchor="ctr" lIns="0" rIns="0" tIns="0" bIns="0">
+            <a:noAutofit/>
           </a:bodyPr>
           <a:lstStyle/>
           <a:p>
             <a:pPr algn="l"/>
             <a:r>
-              <a:rPr sz="3000" b="1">
+              <a:rPr sz="2800" b="1" i="0">
                 <a:solidFill>
                   <a:srgbClr val="1F4E78"/>
                 </a:solidFill>
@@ -9806,8 +9947,8 @@
         </p:nvSpPr>
         <p:spPr>
           <a:xfrm>
-            <a:off x="457200" y="1234440"/>
-            <a:ext cx="1828800" cy="36576"/>
+            <a:off x="457200" y="1298448"/>
+            <a:ext cx="2194560" cy="36576"/>
           </a:xfrm>
           <a:prstGeom prst="rect">
             <a:avLst/>
@@ -9849,8 +9990,8 @@
         </p:nvSpPr>
         <p:spPr>
           <a:xfrm>
-            <a:off x="457200" y="1463040"/>
-            <a:ext cx="11277295" cy="640080"/>
+            <a:off x="457200" y="1508760"/>
+            <a:ext cx="11277295" cy="502920"/>
           </a:xfrm>
           <a:prstGeom prst="rect">
             <a:avLst/>
@@ -9858,14 +9999,14 @@
           <a:noFill/>
         </p:spPr>
         <p:txBody>
-          <a:bodyPr wrap="square" lIns="45720" rIns="45720" tIns="18288" bIns="18288">
-            <a:spAutoFit/>
+          <a:bodyPr wrap="square" anchor="ctr" lIns="0" rIns="0" tIns="0" bIns="0">
+            <a:noAutofit/>
           </a:bodyPr>
           <a:lstStyle/>
           <a:p>
             <a:pPr algn="l"/>
             <a:r>
-              <a:rPr sz="2200" b="1">
+              <a:rPr sz="2000" b="1" i="0">
                 <a:solidFill>
                   <a:srgbClr val="C0392B"/>
                 </a:solidFill>
@@ -9883,8 +10024,8 @@
         </p:nvSpPr>
         <p:spPr>
           <a:xfrm>
-            <a:off x="640080" y="2286000"/>
-            <a:ext cx="10911535" cy="4069080"/>
+            <a:off x="640080" y="2148840"/>
+            <a:ext cx="10911535" cy="4114800"/>
           </a:xfrm>
           <a:prstGeom prst="rect">
             <a:avLst/>
@@ -9892,15 +10033,18 @@
           <a:noFill/>
         </p:spPr>
         <p:txBody>
-          <a:bodyPr wrap="square" lIns="45720" rIns="45720">
-            <a:spAutoFit/>
+          <a:bodyPr wrap="square" anchor="t" lIns="0" rIns="0" tIns="0" bIns="0">
+            <a:noAutofit/>
           </a:bodyPr>
           <a:lstStyle/>
           <a:p>
             <a:pPr algn="l">
               <a:lnSpc>
-                <a:spcPct val="130000"/>
+                <a:spcPct val="135000"/>
               </a:lnSpc>
+              <a:spcAft>
+                <a:spcPts val="600"/>
+              </a:spcAft>
             </a:pPr>
             <a:r>
               <a:rPr sz="1800">
@@ -9914,8 +10058,11 @@
           <a:p>
             <a:pPr algn="l">
               <a:lnSpc>
-                <a:spcPct val="130000"/>
+                <a:spcPct val="135000"/>
               </a:lnSpc>
+              <a:spcAft>
+                <a:spcPts val="600"/>
+              </a:spcAft>
             </a:pPr>
             <a:r>
               <a:rPr sz="1800">
@@ -9929,8 +10076,11 @@
           <a:p>
             <a:pPr algn="l">
               <a:lnSpc>
-                <a:spcPct val="130000"/>
+                <a:spcPct val="135000"/>
               </a:lnSpc>
+              <a:spcAft>
+                <a:spcPts val="600"/>
+              </a:spcAft>
             </a:pPr>
             <a:r>
               <a:rPr sz="1800">
@@ -9944,8 +10094,11 @@
           <a:p>
             <a:pPr algn="l">
               <a:lnSpc>
-                <a:spcPct val="130000"/>
+                <a:spcPct val="135000"/>
               </a:lnSpc>
+              <a:spcAft>
+                <a:spcPts val="600"/>
+              </a:spcAft>
             </a:pPr>
             <a:r>
               <a:rPr sz="1800">
@@ -9975,14 +10128,14 @@
           <a:noFill/>
         </p:spPr>
         <p:txBody>
-          <a:bodyPr wrap="square" lIns="45720" rIns="45720" tIns="18288" bIns="18288">
-            <a:spAutoFit/>
+          <a:bodyPr wrap="square" anchor="ctr" lIns="0" rIns="0" tIns="0" bIns="0">
+            <a:noAutofit/>
           </a:bodyPr>
           <a:lstStyle/>
           <a:p>
             <a:pPr algn="l"/>
             <a:r>
-              <a:rPr sz="1100" b="0">
+              <a:rPr sz="1100" b="0" i="1">
                 <a:solidFill>
                   <a:srgbClr val="808080"/>
                 </a:solidFill>
@@ -10018,8 +10171,8 @@
         </p:nvSpPr>
         <p:spPr>
           <a:xfrm>
-            <a:off x="457200" y="457200"/>
-            <a:ext cx="11277295" cy="822960"/>
+            <a:off x="457200" y="365760"/>
+            <a:ext cx="11277295" cy="914400"/>
           </a:xfrm>
           <a:prstGeom prst="rect">
             <a:avLst/>
@@ -10027,14 +10180,14 @@
           <a:noFill/>
         </p:spPr>
         <p:txBody>
-          <a:bodyPr wrap="square" lIns="45720" rIns="45720" tIns="18288" bIns="18288">
-            <a:spAutoFit/>
+          <a:bodyPr wrap="square" anchor="ctr" lIns="0" rIns="0" tIns="0" bIns="0">
+            <a:noAutofit/>
           </a:bodyPr>
           <a:lstStyle/>
           <a:p>
             <a:pPr algn="l"/>
             <a:r>
-              <a:rPr sz="3000" b="1">
+              <a:rPr sz="2800" b="1" i="0">
                 <a:solidFill>
                   <a:srgbClr val="1F4E78"/>
                 </a:solidFill>
@@ -10052,8 +10205,8 @@
         </p:nvSpPr>
         <p:spPr>
           <a:xfrm>
-            <a:off x="457200" y="1234440"/>
-            <a:ext cx="1828800" cy="36576"/>
+            <a:off x="457200" y="1298448"/>
+            <a:ext cx="2194560" cy="36576"/>
           </a:xfrm>
           <a:prstGeom prst="rect">
             <a:avLst/>
@@ -10095,8 +10248,8 @@
         </p:nvSpPr>
         <p:spPr>
           <a:xfrm>
-            <a:off x="457200" y="1463040"/>
-            <a:ext cx="11277295" cy="640080"/>
+            <a:off x="457200" y="1508760"/>
+            <a:ext cx="11277295" cy="502920"/>
           </a:xfrm>
           <a:prstGeom prst="rect">
             <a:avLst/>
@@ -10104,14 +10257,14 @@
           <a:noFill/>
         </p:spPr>
         <p:txBody>
-          <a:bodyPr wrap="square" lIns="45720" rIns="45720" tIns="18288" bIns="18288">
-            <a:spAutoFit/>
+          <a:bodyPr wrap="square" anchor="ctr" lIns="0" rIns="0" tIns="0" bIns="0">
+            <a:noAutofit/>
           </a:bodyPr>
           <a:lstStyle/>
           <a:p>
             <a:pPr algn="l"/>
             <a:r>
-              <a:rPr sz="2200" b="1">
+              <a:rPr sz="2000" b="1" i="0">
                 <a:solidFill>
                   <a:srgbClr val="C0392B"/>
                 </a:solidFill>
@@ -10129,8 +10282,8 @@
         </p:nvSpPr>
         <p:spPr>
           <a:xfrm>
-            <a:off x="640080" y="2286000"/>
-            <a:ext cx="10911535" cy="4069080"/>
+            <a:off x="640080" y="2148840"/>
+            <a:ext cx="10911535" cy="4114800"/>
           </a:xfrm>
           <a:prstGeom prst="rect">
             <a:avLst/>
@@ -10138,15 +10291,18 @@
           <a:noFill/>
         </p:spPr>
         <p:txBody>
-          <a:bodyPr wrap="square" lIns="45720" rIns="45720">
-            <a:spAutoFit/>
+          <a:bodyPr wrap="square" anchor="t" lIns="0" rIns="0" tIns="0" bIns="0">
+            <a:noAutofit/>
           </a:bodyPr>
           <a:lstStyle/>
           <a:p>
             <a:pPr algn="l">
               <a:lnSpc>
-                <a:spcPct val="130000"/>
+                <a:spcPct val="135000"/>
               </a:lnSpc>
+              <a:spcAft>
+                <a:spcPts val="600"/>
+              </a:spcAft>
             </a:pPr>
             <a:r>
               <a:rPr sz="1800">
@@ -10160,8 +10316,11 @@
           <a:p>
             <a:pPr algn="l">
               <a:lnSpc>
-                <a:spcPct val="130000"/>
+                <a:spcPct val="135000"/>
               </a:lnSpc>
+              <a:spcAft>
+                <a:spcPts val="600"/>
+              </a:spcAft>
             </a:pPr>
             <a:r>
               <a:rPr sz="1800">
@@ -10175,8 +10334,11 @@
           <a:p>
             <a:pPr algn="l">
               <a:lnSpc>
-                <a:spcPct val="130000"/>
+                <a:spcPct val="135000"/>
               </a:lnSpc>
+              <a:spcAft>
+                <a:spcPts val="600"/>
+              </a:spcAft>
             </a:pPr>
             <a:r>
               <a:rPr sz="1800">
@@ -10190,8 +10352,11 @@
           <a:p>
             <a:pPr algn="l">
               <a:lnSpc>
-                <a:spcPct val="130000"/>
+                <a:spcPct val="135000"/>
               </a:lnSpc>
+              <a:spcAft>
+                <a:spcPts val="600"/>
+              </a:spcAft>
             </a:pPr>
             <a:r>
               <a:rPr sz="1800">
@@ -10221,14 +10386,14 @@
           <a:noFill/>
         </p:spPr>
         <p:txBody>
-          <a:bodyPr wrap="square" lIns="45720" rIns="45720" tIns="18288" bIns="18288">
-            <a:spAutoFit/>
+          <a:bodyPr wrap="square" anchor="ctr" lIns="0" rIns="0" tIns="0" bIns="0">
+            <a:noAutofit/>
           </a:bodyPr>
           <a:lstStyle/>
           <a:p>
             <a:pPr algn="l"/>
             <a:r>
-              <a:rPr sz="1100" b="0">
+              <a:rPr sz="1100" b="0" i="1">
                 <a:solidFill>
                   <a:srgbClr val="808080"/>
                 </a:solidFill>
@@ -10264,8 +10429,8 @@
         </p:nvSpPr>
         <p:spPr>
           <a:xfrm>
-            <a:off x="457200" y="457200"/>
-            <a:ext cx="11277295" cy="822960"/>
+            <a:off x="457200" y="365760"/>
+            <a:ext cx="11277295" cy="914400"/>
           </a:xfrm>
           <a:prstGeom prst="rect">
             <a:avLst/>
@@ -10273,14 +10438,14 @@
           <a:noFill/>
         </p:spPr>
         <p:txBody>
-          <a:bodyPr wrap="square" lIns="45720" rIns="45720" tIns="18288" bIns="18288">
-            <a:spAutoFit/>
+          <a:bodyPr wrap="square" anchor="ctr" lIns="0" rIns="0" tIns="0" bIns="0">
+            <a:noAutofit/>
           </a:bodyPr>
           <a:lstStyle/>
           <a:p>
             <a:pPr algn="l"/>
             <a:r>
-              <a:rPr sz="3000" b="1">
+              <a:rPr sz="2800" b="1" i="0">
                 <a:solidFill>
                   <a:srgbClr val="1F4E78"/>
                 </a:solidFill>
@@ -10298,8 +10463,8 @@
         </p:nvSpPr>
         <p:spPr>
           <a:xfrm>
-            <a:off x="457200" y="1234440"/>
-            <a:ext cx="1828800" cy="36576"/>
+            <a:off x="457200" y="1298448"/>
+            <a:ext cx="2194560" cy="36576"/>
           </a:xfrm>
           <a:prstGeom prst="rect">
             <a:avLst/>
@@ -10341,8 +10506,8 @@
         </p:nvSpPr>
         <p:spPr>
           <a:xfrm>
-            <a:off x="457200" y="1463040"/>
-            <a:ext cx="11277295" cy="640080"/>
+            <a:off x="457200" y="1508760"/>
+            <a:ext cx="11277295" cy="502920"/>
           </a:xfrm>
           <a:prstGeom prst="rect">
             <a:avLst/>
@@ -10350,14 +10515,14 @@
           <a:noFill/>
         </p:spPr>
         <p:txBody>
-          <a:bodyPr wrap="square" lIns="45720" rIns="45720" tIns="18288" bIns="18288">
-            <a:spAutoFit/>
+          <a:bodyPr wrap="square" anchor="ctr" lIns="0" rIns="0" tIns="0" bIns="0">
+            <a:noAutofit/>
           </a:bodyPr>
           <a:lstStyle/>
           <a:p>
             <a:pPr algn="l"/>
             <a:r>
-              <a:rPr sz="2200" b="1">
+              <a:rPr sz="2000" b="1" i="0">
                 <a:solidFill>
                   <a:srgbClr val="C0392B"/>
                 </a:solidFill>
@@ -10375,8 +10540,8 @@
         </p:nvSpPr>
         <p:spPr>
           <a:xfrm>
-            <a:off x="640080" y="2286000"/>
-            <a:ext cx="10911535" cy="4069080"/>
+            <a:off x="640080" y="2148840"/>
+            <a:ext cx="10911535" cy="4114800"/>
           </a:xfrm>
           <a:prstGeom prst="rect">
             <a:avLst/>
@@ -10384,15 +10549,18 @@
           <a:noFill/>
         </p:spPr>
         <p:txBody>
-          <a:bodyPr wrap="square" lIns="45720" rIns="45720">
-            <a:spAutoFit/>
+          <a:bodyPr wrap="square" anchor="t" lIns="0" rIns="0" tIns="0" bIns="0">
+            <a:noAutofit/>
           </a:bodyPr>
           <a:lstStyle/>
           <a:p>
             <a:pPr algn="l">
               <a:lnSpc>
-                <a:spcPct val="130000"/>
+                <a:spcPct val="135000"/>
               </a:lnSpc>
+              <a:spcAft>
+                <a:spcPts val="600"/>
+              </a:spcAft>
             </a:pPr>
             <a:r>
               <a:rPr sz="1800">
@@ -10406,8 +10574,11 @@
           <a:p>
             <a:pPr algn="l">
               <a:lnSpc>
-                <a:spcPct val="130000"/>
+                <a:spcPct val="135000"/>
               </a:lnSpc>
+              <a:spcAft>
+                <a:spcPts val="600"/>
+              </a:spcAft>
             </a:pPr>
             <a:r>
               <a:rPr sz="1800">
@@ -10421,8 +10592,11 @@
           <a:p>
             <a:pPr algn="l">
               <a:lnSpc>
-                <a:spcPct val="130000"/>
+                <a:spcPct val="135000"/>
               </a:lnSpc>
+              <a:spcAft>
+                <a:spcPts val="600"/>
+              </a:spcAft>
             </a:pPr>
             <a:r>
               <a:rPr sz="1800">
@@ -10436,8 +10610,11 @@
           <a:p>
             <a:pPr algn="l">
               <a:lnSpc>
-                <a:spcPct val="130000"/>
+                <a:spcPct val="135000"/>
               </a:lnSpc>
+              <a:spcAft>
+                <a:spcPts val="600"/>
+              </a:spcAft>
             </a:pPr>
             <a:r>
               <a:rPr sz="1800">
@@ -10467,14 +10644,14 @@
           <a:noFill/>
         </p:spPr>
         <p:txBody>
-          <a:bodyPr wrap="square" lIns="45720" rIns="45720" tIns="18288" bIns="18288">
-            <a:spAutoFit/>
+          <a:bodyPr wrap="square" anchor="ctr" lIns="0" rIns="0" tIns="0" bIns="0">
+            <a:noAutofit/>
           </a:bodyPr>
           <a:lstStyle/>
           <a:p>
             <a:pPr algn="l"/>
             <a:r>
-              <a:rPr sz="1100" b="0">
+              <a:rPr sz="1100" b="0" i="1">
                 <a:solidFill>
                   <a:srgbClr val="808080"/>
                 </a:solidFill>
@@ -10510,8 +10687,8 @@
         </p:nvSpPr>
         <p:spPr>
           <a:xfrm>
-            <a:off x="457200" y="457200"/>
-            <a:ext cx="11277295" cy="822960"/>
+            <a:off x="457200" y="365760"/>
+            <a:ext cx="11277295" cy="914400"/>
           </a:xfrm>
           <a:prstGeom prst="rect">
             <a:avLst/>
@@ -10519,14 +10696,14 @@
           <a:noFill/>
         </p:spPr>
         <p:txBody>
-          <a:bodyPr wrap="square" lIns="45720" rIns="45720" tIns="18288" bIns="18288">
-            <a:spAutoFit/>
+          <a:bodyPr wrap="square" anchor="ctr" lIns="0" rIns="0" tIns="0" bIns="0">
+            <a:noAutofit/>
           </a:bodyPr>
           <a:lstStyle/>
           <a:p>
             <a:pPr algn="l"/>
             <a:r>
-              <a:rPr sz="3000" b="1">
+              <a:rPr sz="2800" b="1" i="0">
                 <a:solidFill>
                   <a:srgbClr val="1F4E78"/>
                 </a:solidFill>
@@ -10544,8 +10721,8 @@
         </p:nvSpPr>
         <p:spPr>
           <a:xfrm>
-            <a:off x="457200" y="1234440"/>
-            <a:ext cx="1828800" cy="36576"/>
+            <a:off x="457200" y="1298448"/>
+            <a:ext cx="2194560" cy="36576"/>
           </a:xfrm>
           <a:prstGeom prst="rect">
             <a:avLst/>
@@ -10587,8 +10764,8 @@
         </p:nvSpPr>
         <p:spPr>
           <a:xfrm>
-            <a:off x="457200" y="1463040"/>
-            <a:ext cx="11277295" cy="640080"/>
+            <a:off x="457200" y="1508760"/>
+            <a:ext cx="11277295" cy="502920"/>
           </a:xfrm>
           <a:prstGeom prst="rect">
             <a:avLst/>
@@ -10596,14 +10773,14 @@
           <a:noFill/>
         </p:spPr>
         <p:txBody>
-          <a:bodyPr wrap="square" lIns="45720" rIns="45720" tIns="18288" bIns="18288">
-            <a:spAutoFit/>
+          <a:bodyPr wrap="square" anchor="ctr" lIns="0" rIns="0" tIns="0" bIns="0">
+            <a:noAutofit/>
           </a:bodyPr>
           <a:lstStyle/>
           <a:p>
             <a:pPr algn="l"/>
             <a:r>
-              <a:rPr sz="2200" b="1">
+              <a:rPr sz="2000" b="1" i="0">
                 <a:solidFill>
                   <a:srgbClr val="C0392B"/>
                 </a:solidFill>
@@ -10621,8 +10798,8 @@
         </p:nvSpPr>
         <p:spPr>
           <a:xfrm>
-            <a:off x="640080" y="2286000"/>
-            <a:ext cx="10911535" cy="4069080"/>
+            <a:off x="640080" y="2148840"/>
+            <a:ext cx="10911535" cy="4114800"/>
           </a:xfrm>
           <a:prstGeom prst="rect">
             <a:avLst/>
@@ -10630,15 +10807,18 @@
           <a:noFill/>
         </p:spPr>
         <p:txBody>
-          <a:bodyPr wrap="square" lIns="45720" rIns="45720">
-            <a:spAutoFit/>
+          <a:bodyPr wrap="square" anchor="t" lIns="0" rIns="0" tIns="0" bIns="0">
+            <a:noAutofit/>
           </a:bodyPr>
           <a:lstStyle/>
           <a:p>
             <a:pPr algn="l">
               <a:lnSpc>
-                <a:spcPct val="130000"/>
+                <a:spcPct val="135000"/>
               </a:lnSpc>
+              <a:spcAft>
+                <a:spcPts val="600"/>
+              </a:spcAft>
             </a:pPr>
             <a:r>
               <a:rPr sz="1800">
@@ -10652,8 +10832,11 @@
           <a:p>
             <a:pPr algn="l">
               <a:lnSpc>
-                <a:spcPct val="130000"/>
+                <a:spcPct val="135000"/>
               </a:lnSpc>
+              <a:spcAft>
+                <a:spcPts val="600"/>
+              </a:spcAft>
             </a:pPr>
             <a:r>
               <a:rPr sz="1800">
@@ -10667,8 +10850,11 @@
           <a:p>
             <a:pPr algn="l">
               <a:lnSpc>
-                <a:spcPct val="130000"/>
+                <a:spcPct val="135000"/>
               </a:lnSpc>
+              <a:spcAft>
+                <a:spcPts val="600"/>
+              </a:spcAft>
             </a:pPr>
             <a:r>
               <a:rPr sz="1800">
@@ -10682,8 +10868,11 @@
           <a:p>
             <a:pPr algn="l">
               <a:lnSpc>
-                <a:spcPct val="130000"/>
+                <a:spcPct val="135000"/>
               </a:lnSpc>
+              <a:spcAft>
+                <a:spcPts val="600"/>
+              </a:spcAft>
             </a:pPr>
             <a:r>
               <a:rPr sz="1800">
@@ -10722,8 +10911,8 @@
         </p:nvSpPr>
         <p:spPr>
           <a:xfrm>
-            <a:off x="457200" y="457200"/>
-            <a:ext cx="11277295" cy="822960"/>
+            <a:off x="457200" y="365760"/>
+            <a:ext cx="11277295" cy="914400"/>
           </a:xfrm>
           <a:prstGeom prst="rect">
             <a:avLst/>
@@ -10731,14 +10920,14 @@
           <a:noFill/>
         </p:spPr>
         <p:txBody>
-          <a:bodyPr wrap="square" lIns="45720" rIns="45720" tIns="18288" bIns="18288">
-            <a:spAutoFit/>
+          <a:bodyPr wrap="square" anchor="ctr" lIns="0" rIns="0" tIns="0" bIns="0">
+            <a:noAutofit/>
           </a:bodyPr>
           <a:lstStyle/>
           <a:p>
             <a:pPr algn="l"/>
             <a:r>
-              <a:rPr sz="3000" b="1">
+              <a:rPr sz="2800" b="1" i="0">
                 <a:solidFill>
                   <a:srgbClr val="1F4E78"/>
                 </a:solidFill>
@@ -10756,8 +10945,8 @@
         </p:nvSpPr>
         <p:spPr>
           <a:xfrm>
-            <a:off x="457200" y="1234440"/>
-            <a:ext cx="1828800" cy="36576"/>
+            <a:off x="457200" y="1298448"/>
+            <a:ext cx="2194560" cy="36576"/>
           </a:xfrm>
           <a:prstGeom prst="rect">
             <a:avLst/>
@@ -10799,8 +10988,8 @@
         </p:nvSpPr>
         <p:spPr>
           <a:xfrm>
-            <a:off x="457200" y="1463040"/>
-            <a:ext cx="11277295" cy="640080"/>
+            <a:off x="457200" y="1508760"/>
+            <a:ext cx="11277295" cy="502920"/>
           </a:xfrm>
           <a:prstGeom prst="rect">
             <a:avLst/>
@@ -10808,14 +10997,14 @@
           <a:noFill/>
         </p:spPr>
         <p:txBody>
-          <a:bodyPr wrap="square" lIns="45720" rIns="45720" tIns="18288" bIns="18288">
-            <a:spAutoFit/>
+          <a:bodyPr wrap="square" anchor="ctr" lIns="0" rIns="0" tIns="0" bIns="0">
+            <a:noAutofit/>
           </a:bodyPr>
           <a:lstStyle/>
           <a:p>
             <a:pPr algn="l"/>
             <a:r>
-              <a:rPr sz="2200" b="1">
+              <a:rPr sz="2000" b="1" i="0">
                 <a:solidFill>
                   <a:srgbClr val="C0392B"/>
                 </a:solidFill>
@@ -10834,7 +11023,7 @@
           <p:nvPr/>
         </p:nvGraphicFramePr>
         <p:xfrm>
-          <a:off x="457200" y="2286000"/>
+          <a:off x="457200" y="2148840"/>
           <a:ext cx="11277295" cy="2286000"/>
         </p:xfrm>
         <a:graphic>
@@ -11209,14 +11398,14 @@
           <a:noFill/>
         </p:spPr>
         <p:txBody>
-          <a:bodyPr wrap="square" lIns="45720" rIns="45720" tIns="18288" bIns="18288">
-            <a:spAutoFit/>
+          <a:bodyPr wrap="square" anchor="ctr" lIns="0" rIns="0" tIns="0" bIns="0">
+            <a:noAutofit/>
           </a:bodyPr>
           <a:lstStyle/>
           <a:p>
             <a:pPr algn="l"/>
             <a:r>
-              <a:rPr sz="1100" b="0">
+              <a:rPr sz="1100" b="0" i="1">
                 <a:solidFill>
                   <a:srgbClr val="808080"/>
                 </a:solidFill>
@@ -11252,8 +11441,8 @@
         </p:nvSpPr>
         <p:spPr>
           <a:xfrm>
-            <a:off x="457200" y="457200"/>
-            <a:ext cx="11277295" cy="822960"/>
+            <a:off x="457200" y="365760"/>
+            <a:ext cx="11277295" cy="914400"/>
           </a:xfrm>
           <a:prstGeom prst="rect">
             <a:avLst/>
@@ -11261,14 +11450,14 @@
           <a:noFill/>
         </p:spPr>
         <p:txBody>
-          <a:bodyPr wrap="square" lIns="45720" rIns="45720" tIns="18288" bIns="18288">
-            <a:spAutoFit/>
+          <a:bodyPr wrap="square" anchor="ctr" lIns="0" rIns="0" tIns="0" bIns="0">
+            <a:noAutofit/>
           </a:bodyPr>
           <a:lstStyle/>
           <a:p>
             <a:pPr algn="l"/>
             <a:r>
-              <a:rPr sz="3000" b="1">
+              <a:rPr sz="2800" b="1" i="0">
                 <a:solidFill>
                   <a:srgbClr val="1F4E78"/>
                 </a:solidFill>
@@ -11286,8 +11475,8 @@
         </p:nvSpPr>
         <p:spPr>
           <a:xfrm>
-            <a:off x="457200" y="1234440"/>
-            <a:ext cx="1828800" cy="36576"/>
+            <a:off x="457200" y="1298448"/>
+            <a:ext cx="2194560" cy="36576"/>
           </a:xfrm>
           <a:prstGeom prst="rect">
             <a:avLst/>
@@ -11329,8 +11518,8 @@
         </p:nvSpPr>
         <p:spPr>
           <a:xfrm>
-            <a:off x="457200" y="1463040"/>
-            <a:ext cx="11277295" cy="640080"/>
+            <a:off x="457200" y="1508760"/>
+            <a:ext cx="11277295" cy="502920"/>
           </a:xfrm>
           <a:prstGeom prst="rect">
             <a:avLst/>
@@ -11338,14 +11527,14 @@
           <a:noFill/>
         </p:spPr>
         <p:txBody>
-          <a:bodyPr wrap="square" lIns="45720" rIns="45720" tIns="18288" bIns="18288">
-            <a:spAutoFit/>
+          <a:bodyPr wrap="square" anchor="ctr" lIns="0" rIns="0" tIns="0" bIns="0">
+            <a:noAutofit/>
           </a:bodyPr>
           <a:lstStyle/>
           <a:p>
             <a:pPr algn="l"/>
             <a:r>
-              <a:rPr sz="2200" b="1">
+              <a:rPr sz="2000" b="1" i="0">
                 <a:solidFill>
                   <a:srgbClr val="C0392B"/>
                 </a:solidFill>
@@ -11363,8 +11552,8 @@
         </p:nvSpPr>
         <p:spPr>
           <a:xfrm>
-            <a:off x="640080" y="2286000"/>
-            <a:ext cx="10911535" cy="4069080"/>
+            <a:off x="640080" y="2148840"/>
+            <a:ext cx="10911535" cy="4114800"/>
           </a:xfrm>
           <a:prstGeom prst="rect">
             <a:avLst/>
@@ -11372,15 +11561,18 @@
           <a:noFill/>
         </p:spPr>
         <p:txBody>
-          <a:bodyPr wrap="square" lIns="45720" rIns="45720">
-            <a:spAutoFit/>
+          <a:bodyPr wrap="square" anchor="t" lIns="0" rIns="0" tIns="0" bIns="0">
+            <a:noAutofit/>
           </a:bodyPr>
           <a:lstStyle/>
           <a:p>
             <a:pPr algn="l">
               <a:lnSpc>
-                <a:spcPct val="130000"/>
+                <a:spcPct val="135000"/>
               </a:lnSpc>
+              <a:spcAft>
+                <a:spcPts val="600"/>
+              </a:spcAft>
             </a:pPr>
             <a:r>
               <a:rPr sz="1800">
@@ -11394,8 +11586,11 @@
           <a:p>
             <a:pPr algn="l">
               <a:lnSpc>
-                <a:spcPct val="130000"/>
+                <a:spcPct val="135000"/>
               </a:lnSpc>
+              <a:spcAft>
+                <a:spcPts val="600"/>
+              </a:spcAft>
             </a:pPr>
             <a:r>
               <a:rPr sz="1800">
@@ -11409,8 +11604,11 @@
           <a:p>
             <a:pPr algn="l">
               <a:lnSpc>
-                <a:spcPct val="130000"/>
+                <a:spcPct val="135000"/>
               </a:lnSpc>
+              <a:spcAft>
+                <a:spcPts val="600"/>
+              </a:spcAft>
             </a:pPr>
             <a:r>
               <a:rPr sz="1800">
@@ -11424,8 +11622,11 @@
           <a:p>
             <a:pPr algn="l">
               <a:lnSpc>
-                <a:spcPct val="130000"/>
+                <a:spcPct val="135000"/>
               </a:lnSpc>
+              <a:spcAft>
+                <a:spcPts val="600"/>
+              </a:spcAft>
             </a:pPr>
             <a:r>
               <a:rPr sz="1800">
@@ -11464,8 +11665,8 @@
         </p:nvSpPr>
         <p:spPr>
           <a:xfrm>
-            <a:off x="457200" y="457200"/>
-            <a:ext cx="11277295" cy="822960"/>
+            <a:off x="457200" y="365760"/>
+            <a:ext cx="11277295" cy="914400"/>
           </a:xfrm>
           <a:prstGeom prst="rect">
             <a:avLst/>
@@ -11473,14 +11674,14 @@
           <a:noFill/>
         </p:spPr>
         <p:txBody>
-          <a:bodyPr wrap="square" lIns="45720" rIns="45720" tIns="18288" bIns="18288">
-            <a:spAutoFit/>
+          <a:bodyPr wrap="square" anchor="ctr" lIns="0" rIns="0" tIns="0" bIns="0">
+            <a:noAutofit/>
           </a:bodyPr>
           <a:lstStyle/>
           <a:p>
             <a:pPr algn="l"/>
             <a:r>
-              <a:rPr sz="3000" b="1">
+              <a:rPr sz="2800" b="1" i="0">
                 <a:solidFill>
                   <a:srgbClr val="1F4E78"/>
                 </a:solidFill>
@@ -11498,8 +11699,8 @@
         </p:nvSpPr>
         <p:spPr>
           <a:xfrm>
-            <a:off x="457200" y="1234440"/>
-            <a:ext cx="1828800" cy="36576"/>
+            <a:off x="457200" y="1298448"/>
+            <a:ext cx="2194560" cy="36576"/>
           </a:xfrm>
           <a:prstGeom prst="rect">
             <a:avLst/>
@@ -11541,8 +11742,8 @@
         </p:nvSpPr>
         <p:spPr>
           <a:xfrm>
-            <a:off x="822960" y="1463040"/>
-            <a:ext cx="10545775" cy="4892040"/>
+            <a:off x="822960" y="2148840"/>
+            <a:ext cx="10545775" cy="4114800"/>
           </a:xfrm>
           <a:prstGeom prst="rect">
             <a:avLst/>
@@ -11550,15 +11751,18 @@
           <a:noFill/>
         </p:spPr>
         <p:txBody>
-          <a:bodyPr wrap="square" lIns="45720" rIns="45720">
-            <a:spAutoFit/>
+          <a:bodyPr wrap="square" anchor="t" lIns="0" rIns="0" tIns="0" bIns="0">
+            <a:noAutofit/>
           </a:bodyPr>
           <a:lstStyle/>
           <a:p>
             <a:pPr algn="l">
               <a:lnSpc>
-                <a:spcPct val="130000"/>
+                <a:spcPct val="135000"/>
               </a:lnSpc>
+              <a:spcAft>
+                <a:spcPts val="600"/>
+              </a:spcAft>
             </a:pPr>
             <a:r>
               <a:rPr sz="2200">
@@ -11572,8 +11776,11 @@
           <a:p>
             <a:pPr algn="l">
               <a:lnSpc>
-                <a:spcPct val="130000"/>
+                <a:spcPct val="135000"/>
               </a:lnSpc>
+              <a:spcAft>
+                <a:spcPts val="600"/>
+              </a:spcAft>
             </a:pPr>
             <a:r>
               <a:rPr sz="2200">
@@ -11587,8 +11794,11 @@
           <a:p>
             <a:pPr algn="l">
               <a:lnSpc>
-                <a:spcPct val="130000"/>
+                <a:spcPct val="135000"/>
               </a:lnSpc>
+              <a:spcAft>
+                <a:spcPts val="600"/>
+              </a:spcAft>
             </a:pPr>
             <a:r>
               <a:rPr sz="2200">
@@ -11602,8 +11812,11 @@
           <a:p>
             <a:pPr algn="l">
               <a:lnSpc>
-                <a:spcPct val="130000"/>
+                <a:spcPct val="135000"/>
               </a:lnSpc>
+              <a:spcAft>
+                <a:spcPts val="600"/>
+              </a:spcAft>
             </a:pPr>
             <a:r>
               <a:rPr sz="2200">
@@ -11617,8 +11830,11 @@
           <a:p>
             <a:pPr algn="l">
               <a:lnSpc>
-                <a:spcPct val="130000"/>
+                <a:spcPct val="135000"/>
               </a:lnSpc>
+              <a:spcAft>
+                <a:spcPts val="600"/>
+              </a:spcAft>
             </a:pPr>
             <a:r>
               <a:rPr sz="2200">
@@ -11709,14 +11925,14 @@
           <a:noFill/>
         </p:spPr>
         <p:txBody>
-          <a:bodyPr wrap="square" lIns="45720" rIns="45720" tIns="18288" bIns="18288">
-            <a:spAutoFit/>
+          <a:bodyPr wrap="square" anchor="ctr" lIns="0" rIns="0" tIns="0" bIns="0">
+            <a:noAutofit/>
           </a:bodyPr>
           <a:lstStyle/>
           <a:p>
             <a:pPr algn="ctr"/>
             <a:r>
-              <a:rPr sz="5800" b="1">
+              <a:rPr sz="5800" b="1" i="0">
                 <a:solidFill>
                   <a:srgbClr val="FFFFFF"/>
                 </a:solidFill>
@@ -11752,8 +11968,8 @@
         </p:nvSpPr>
         <p:spPr>
           <a:xfrm>
-            <a:off x="457200" y="457200"/>
-            <a:ext cx="11277295" cy="822960"/>
+            <a:off x="457200" y="365760"/>
+            <a:ext cx="11277295" cy="914400"/>
           </a:xfrm>
           <a:prstGeom prst="rect">
             <a:avLst/>
@@ -11761,14 +11977,14 @@
           <a:noFill/>
         </p:spPr>
         <p:txBody>
-          <a:bodyPr wrap="square" lIns="45720" rIns="45720" tIns="18288" bIns="18288">
-            <a:spAutoFit/>
+          <a:bodyPr wrap="square" anchor="ctr" lIns="0" rIns="0" tIns="0" bIns="0">
+            <a:noAutofit/>
           </a:bodyPr>
           <a:lstStyle/>
           <a:p>
             <a:pPr algn="l"/>
             <a:r>
-              <a:rPr sz="3000" b="1">
+              <a:rPr sz="2800" b="1" i="0">
                 <a:solidFill>
                   <a:srgbClr val="1F4E78"/>
                 </a:solidFill>
@@ -11786,8 +12002,8 @@
         </p:nvSpPr>
         <p:spPr>
           <a:xfrm>
-            <a:off x="457200" y="1234440"/>
-            <a:ext cx="1828800" cy="36576"/>
+            <a:off x="457200" y="1298448"/>
+            <a:ext cx="2194560" cy="36576"/>
           </a:xfrm>
           <a:prstGeom prst="rect">
             <a:avLst/>
@@ -11829,8 +12045,8 @@
         </p:nvSpPr>
         <p:spPr>
           <a:xfrm>
-            <a:off x="457200" y="1463040"/>
-            <a:ext cx="11277295" cy="640080"/>
+            <a:off x="457200" y="1508760"/>
+            <a:ext cx="11277295" cy="502920"/>
           </a:xfrm>
           <a:prstGeom prst="rect">
             <a:avLst/>
@@ -11838,14 +12054,14 @@
           <a:noFill/>
         </p:spPr>
         <p:txBody>
-          <a:bodyPr wrap="square" lIns="45720" rIns="45720" tIns="18288" bIns="18288">
-            <a:spAutoFit/>
+          <a:bodyPr wrap="square" anchor="ctr" lIns="0" rIns="0" tIns="0" bIns="0">
+            <a:noAutofit/>
           </a:bodyPr>
           <a:lstStyle/>
           <a:p>
             <a:pPr algn="l"/>
             <a:r>
-              <a:rPr sz="2200" b="1">
+              <a:rPr sz="2000" b="1" i="0">
                 <a:solidFill>
                   <a:srgbClr val="C0392B"/>
                 </a:solidFill>
@@ -11864,7 +12080,7 @@
           <p:nvPr/>
         </p:nvGraphicFramePr>
         <p:xfrm>
-          <a:off x="457200" y="2286000"/>
+          <a:off x="457200" y="2148840"/>
           <a:ext cx="11277295" cy="2743200"/>
         </p:xfrm>
         <a:graphic>
@@ -12183,8 +12399,8 @@
         </p:nvSpPr>
         <p:spPr>
           <a:xfrm>
-            <a:off x="457200" y="457200"/>
-            <a:ext cx="11277295" cy="822960"/>
+            <a:off x="457200" y="365760"/>
+            <a:ext cx="11277295" cy="914400"/>
           </a:xfrm>
           <a:prstGeom prst="rect">
             <a:avLst/>
@@ -12192,14 +12408,14 @@
           <a:noFill/>
         </p:spPr>
         <p:txBody>
-          <a:bodyPr wrap="square" lIns="45720" rIns="45720" tIns="18288" bIns="18288">
-            <a:spAutoFit/>
+          <a:bodyPr wrap="square" anchor="ctr" lIns="0" rIns="0" tIns="0" bIns="0">
+            <a:noAutofit/>
           </a:bodyPr>
           <a:lstStyle/>
           <a:p>
             <a:pPr algn="l"/>
             <a:r>
-              <a:rPr sz="3000" b="1">
+              <a:rPr sz="2800" b="1" i="0">
                 <a:solidFill>
                   <a:srgbClr val="1F4E78"/>
                 </a:solidFill>
@@ -12217,8 +12433,8 @@
         </p:nvSpPr>
         <p:spPr>
           <a:xfrm>
-            <a:off x="457200" y="1234440"/>
-            <a:ext cx="1828800" cy="36576"/>
+            <a:off x="457200" y="1298448"/>
+            <a:ext cx="2194560" cy="36576"/>
           </a:xfrm>
           <a:prstGeom prst="rect">
             <a:avLst/>
@@ -12260,8 +12476,8 @@
         </p:nvSpPr>
         <p:spPr>
           <a:xfrm>
-            <a:off x="457200" y="1463040"/>
-            <a:ext cx="11277295" cy="640080"/>
+            <a:off x="457200" y="1508760"/>
+            <a:ext cx="11277295" cy="502920"/>
           </a:xfrm>
           <a:prstGeom prst="rect">
             <a:avLst/>
@@ -12269,14 +12485,14 @@
           <a:noFill/>
         </p:spPr>
         <p:txBody>
-          <a:bodyPr wrap="square" lIns="45720" rIns="45720" tIns="18288" bIns="18288">
-            <a:spAutoFit/>
+          <a:bodyPr wrap="square" anchor="ctr" lIns="0" rIns="0" tIns="0" bIns="0">
+            <a:noAutofit/>
           </a:bodyPr>
           <a:lstStyle/>
           <a:p>
             <a:pPr algn="l"/>
             <a:r>
-              <a:rPr sz="2200" b="1">
+              <a:rPr sz="2000" b="1" i="0">
                 <a:solidFill>
                   <a:srgbClr val="C0392B"/>
                 </a:solidFill>
@@ -12294,8 +12510,8 @@
         </p:nvSpPr>
         <p:spPr>
           <a:xfrm>
-            <a:off x="640080" y="2286000"/>
-            <a:ext cx="10911535" cy="4069080"/>
+            <a:off x="640080" y="2148840"/>
+            <a:ext cx="10911535" cy="4114800"/>
           </a:xfrm>
           <a:prstGeom prst="rect">
             <a:avLst/>
@@ -12303,15 +12519,18 @@
           <a:noFill/>
         </p:spPr>
         <p:txBody>
-          <a:bodyPr wrap="square" lIns="45720" rIns="45720">
-            <a:spAutoFit/>
+          <a:bodyPr wrap="square" anchor="t" lIns="0" rIns="0" tIns="0" bIns="0">
+            <a:noAutofit/>
           </a:bodyPr>
           <a:lstStyle/>
           <a:p>
             <a:pPr algn="l">
               <a:lnSpc>
-                <a:spcPct val="130000"/>
+                <a:spcPct val="135000"/>
               </a:lnSpc>
+              <a:spcAft>
+                <a:spcPts val="600"/>
+              </a:spcAft>
             </a:pPr>
             <a:r>
               <a:rPr sz="1800">
@@ -12325,8 +12544,11 @@
           <a:p>
             <a:pPr algn="l">
               <a:lnSpc>
-                <a:spcPct val="130000"/>
+                <a:spcPct val="135000"/>
               </a:lnSpc>
+              <a:spcAft>
+                <a:spcPts val="600"/>
+              </a:spcAft>
             </a:pPr>
             <a:r>
               <a:rPr sz="1800">
@@ -12340,8 +12562,11 @@
           <a:p>
             <a:pPr algn="l">
               <a:lnSpc>
-                <a:spcPct val="130000"/>
+                <a:spcPct val="135000"/>
               </a:lnSpc>
+              <a:spcAft>
+                <a:spcPts val="600"/>
+              </a:spcAft>
             </a:pPr>
             <a:r>
               <a:rPr sz="1800">
@@ -12355,8 +12580,11 @@
           <a:p>
             <a:pPr algn="l">
               <a:lnSpc>
-                <a:spcPct val="130000"/>
+                <a:spcPct val="135000"/>
               </a:lnSpc>
+              <a:spcAft>
+                <a:spcPts val="600"/>
+              </a:spcAft>
             </a:pPr>
             <a:r>
               <a:rPr sz="1800">
